--- a/ResiliTrack_AI_Pitch_Deck.pptx
+++ b/ResiliTrack_AI_Pitch_Deck.pptx
@@ -10,8 +10,11 @@
     <p:sldId id="258" r:id="rId9"/>
     <p:sldId id="259" r:id="rId10"/>
     <p:sldId id="260" r:id="rId11"/>
+    <p:sldId id="261" r:id="rId12"/>
+    <p:sldId id="262" r:id="rId13"/>
+    <p:sldId id="263" r:id="rId14"/>
   </p:sldIdLst>
-  <p:sldSz cx="9144000" cy="6858000" type="screen4x3"/>
+  <p:sldSz cx="12188952" cy="6858000" type="screen4x3"/>
   <p:notesSz cx="6858000" cy="9144000"/>
   <p:defaultTextStyle>
     <a:defPPr>
@@ -3085,6 +3088,14 @@
 <file path=ppt/slides/slide1.xml><?xml version="1.0" encoding="utf-8"?>
 <p:sld xmlns:a="http://schemas.openxmlformats.org/drawingml/2006/main" xmlns:p="http://schemas.openxmlformats.org/presentationml/2006/main" xmlns:r="http://schemas.openxmlformats.org/officeDocument/2006/relationships">
   <p:cSld>
+    <p:bg>
+      <p:bgPr>
+        <a:solidFill>
+          <a:srgbClr val="0F172A"/>
+        </a:solidFill>
+        <a:effectLst/>
+      </p:bgPr>
+    </p:bg>
     <p:spTree>
       <p:nvGrpSpPr>
         <p:cNvPr id="1" name=""/>
@@ -3094,20 +3105,153 @@
       <p:grpSpPr/>
       <p:sp>
         <p:nvSpPr>
-          <p:cNvPr id="2" name="Title 1"/>
-          <p:cNvSpPr>
-            <a:spLocks noGrp="1"/>
-          </p:cNvSpPr>
-          <p:nvPr>
-            <p:ph type="ctrTitle"/>
-          </p:nvPr>
-        </p:nvSpPr>
-        <p:spPr/>
-        <p:txBody>
-          <a:bodyPr/>
-          <a:lstStyle/>
-          <a:p>
-            <a:r>
+          <p:cNvPr id="2" name="Rectangle 1"/>
+          <p:cNvSpPr/>
+          <p:nvPr/>
+        </p:nvSpPr>
+        <p:spPr>
+          <a:xfrm>
+            <a:off x="0" y="0"/>
+            <a:ext cx="12188952" cy="73152"/>
+          </a:xfrm>
+          <a:prstGeom prst="rect">
+            <a:avLst/>
+          </a:prstGeom>
+          <a:solidFill>
+            <a:srgbClr val="1E88E5"/>
+          </a:solidFill>
+          <a:ln>
+            <a:noFill/>
+          </a:ln>
+        </p:spPr>
+        <p:style>
+          <a:lnRef idx="1">
+            <a:schemeClr val="accent1"/>
+          </a:lnRef>
+          <a:fillRef idx="3">
+            <a:schemeClr val="accent1"/>
+          </a:fillRef>
+          <a:effectRef idx="2">
+            <a:schemeClr val="accent1"/>
+          </a:effectRef>
+          <a:fontRef idx="minor">
+            <a:schemeClr val="lt1"/>
+          </a:fontRef>
+        </p:style>
+        <p:txBody>
+          <a:bodyPr rtlCol="0" anchor="ctr"/>
+          <a:lstStyle/>
+          <a:p>
+            <a:pPr algn="ctr"/>
+          </a:p>
+        </p:txBody>
+      </p:sp>
+      <p:sp>
+        <p:nvSpPr>
+          <p:cNvPr id="3" name="Rectangle 2"/>
+          <p:cNvSpPr/>
+          <p:nvPr/>
+        </p:nvSpPr>
+        <p:spPr>
+          <a:xfrm>
+            <a:off x="0" y="6784848"/>
+            <a:ext cx="12188952" cy="73152"/>
+          </a:xfrm>
+          <a:prstGeom prst="rect">
+            <a:avLst/>
+          </a:prstGeom>
+          <a:solidFill>
+            <a:srgbClr val="38BDF8"/>
+          </a:solidFill>
+          <a:ln>
+            <a:noFill/>
+          </a:ln>
+        </p:spPr>
+        <p:style>
+          <a:lnRef idx="1">
+            <a:schemeClr val="accent1"/>
+          </a:lnRef>
+          <a:fillRef idx="3">
+            <a:schemeClr val="accent1"/>
+          </a:fillRef>
+          <a:effectRef idx="2">
+            <a:schemeClr val="accent1"/>
+          </a:effectRef>
+          <a:fontRef idx="minor">
+            <a:schemeClr val="lt1"/>
+          </a:fontRef>
+        </p:style>
+        <p:txBody>
+          <a:bodyPr rtlCol="0" anchor="ctr"/>
+          <a:lstStyle/>
+          <a:p>
+            <a:pPr algn="ctr"/>
+          </a:p>
+        </p:txBody>
+      </p:sp>
+      <p:sp>
+        <p:nvSpPr>
+          <p:cNvPr id="4" name="TextBox 3"/>
+          <p:cNvSpPr txBox="1"/>
+          <p:nvPr/>
+        </p:nvSpPr>
+        <p:spPr>
+          <a:xfrm>
+            <a:off x="5394960" y="914400"/>
+            <a:ext cx="1828800" cy="1097280"/>
+          </a:xfrm>
+          <a:prstGeom prst="rect">
+            <a:avLst/>
+          </a:prstGeom>
+          <a:noFill/>
+        </p:spPr>
+        <p:txBody>
+          <a:bodyPr wrap="square">
+            <a:spAutoFit/>
+          </a:bodyPr>
+          <a:lstStyle/>
+          <a:p>
+            <a:pPr algn="ctr"/>
+            <a:r>
+              <a:rPr sz="5200" b="0" i="0">
+                <a:solidFill>
+                  <a:srgbClr val="FFFFFF"/>
+                </a:solidFill>
+              </a:rPr>
+              <a:t>🌀</a:t>
+            </a:r>
+          </a:p>
+        </p:txBody>
+      </p:sp>
+      <p:sp>
+        <p:nvSpPr>
+          <p:cNvPr id="5" name="TextBox 4"/>
+          <p:cNvSpPr txBox="1"/>
+          <p:nvPr/>
+        </p:nvSpPr>
+        <p:spPr>
+          <a:xfrm>
+            <a:off x="914400" y="2011680"/>
+            <a:ext cx="10360152" cy="1097280"/>
+          </a:xfrm>
+          <a:prstGeom prst="rect">
+            <a:avLst/>
+          </a:prstGeom>
+          <a:noFill/>
+        </p:spPr>
+        <p:txBody>
+          <a:bodyPr wrap="square">
+            <a:spAutoFit/>
+          </a:bodyPr>
+          <a:lstStyle/>
+          <a:p>
+            <a:pPr algn="ctr"/>
+            <a:r>
+              <a:rPr sz="5200" b="1" i="0">
+                <a:solidFill>
+                  <a:srgbClr val="FFFFFF"/>
+                </a:solidFill>
+              </a:rPr>
               <a:t>ResiliTrack AI</a:t>
             </a:r>
           </a:p>
@@ -3115,26 +3259,179 @@
       </p:sp>
       <p:sp>
         <p:nvSpPr>
-          <p:cNvPr id="3" name="Subtitle 2"/>
-          <p:cNvSpPr>
-            <a:spLocks noGrp="1"/>
-          </p:cNvSpPr>
-          <p:nvPr>
-            <p:ph type="subTitle" idx="1"/>
-          </p:nvPr>
-        </p:nvSpPr>
-        <p:spPr/>
-        <p:txBody>
-          <a:bodyPr/>
-          <a:lstStyle/>
-          <a:p>
-            <a:r>
-              <a:t>Anticipatory Disaster Intelligence</a:t>
-            </a:r>
-          </a:p>
-          <a:p>
-            <a:r>
+          <p:cNvPr id="6" name="TextBox 5"/>
+          <p:cNvSpPr txBox="1"/>
+          <p:nvPr/>
+        </p:nvSpPr>
+        <p:spPr>
+          <a:xfrm>
+            <a:off x="914400" y="3017520"/>
+            <a:ext cx="10360152" cy="548640"/>
+          </a:xfrm>
+          <a:prstGeom prst="rect">
+            <a:avLst/>
+          </a:prstGeom>
+          <a:noFill/>
+        </p:spPr>
+        <p:txBody>
+          <a:bodyPr wrap="square">
+            <a:spAutoFit/>
+          </a:bodyPr>
+          <a:lstStyle/>
+          <a:p>
+            <a:pPr algn="ctr"/>
+            <a:r>
+              <a:rPr sz="2200" b="0" i="0">
+                <a:solidFill>
+                  <a:srgbClr val="38BDF8"/>
+                </a:solidFill>
+              </a:rPr>
+              <a:t>Anticipatory Disaster Intelligence Platform</a:t>
+            </a:r>
+          </a:p>
+        </p:txBody>
+      </p:sp>
+      <p:sp>
+        <p:nvSpPr>
+          <p:cNvPr id="7" name="TextBox 6"/>
+          <p:cNvSpPr txBox="1"/>
+          <p:nvPr/>
+        </p:nvSpPr>
+        <p:spPr>
+          <a:xfrm>
+            <a:off x="914400" y="3657600"/>
+            <a:ext cx="10360152" cy="548640"/>
+          </a:xfrm>
+          <a:prstGeom prst="rect">
+            <a:avLst/>
+          </a:prstGeom>
+          <a:noFill/>
+        </p:spPr>
+        <p:txBody>
+          <a:bodyPr wrap="square">
+            <a:spAutoFit/>
+          </a:bodyPr>
+          <a:lstStyle/>
+          <a:p>
+            <a:pPr algn="ctr"/>
+            <a:r>
+              <a:rPr sz="1600" b="0" i="0">
+                <a:solidFill>
+                  <a:srgbClr val="B0BEC5"/>
+                </a:solidFill>
+              </a:rPr>
               <a:t>Track 5: Cyclone Impact &amp; Infrastructure Vulnerability Forecaster</a:t>
+            </a:r>
+          </a:p>
+        </p:txBody>
+      </p:sp>
+      <p:sp>
+        <p:nvSpPr>
+          <p:cNvPr id="8" name="Rectangle 7"/>
+          <p:cNvSpPr/>
+          <p:nvPr/>
+        </p:nvSpPr>
+        <p:spPr>
+          <a:xfrm>
+            <a:off x="3200400" y="4389120"/>
+            <a:ext cx="5788152" cy="36576"/>
+          </a:xfrm>
+          <a:prstGeom prst="rect">
+            <a:avLst/>
+          </a:prstGeom>
+          <a:solidFill>
+            <a:srgbClr val="38BDF8"/>
+          </a:solidFill>
+          <a:ln>
+            <a:noFill/>
+          </a:ln>
+        </p:spPr>
+        <p:style>
+          <a:lnRef idx="1">
+            <a:schemeClr val="accent1"/>
+          </a:lnRef>
+          <a:fillRef idx="3">
+            <a:schemeClr val="accent1"/>
+          </a:fillRef>
+          <a:effectRef idx="2">
+            <a:schemeClr val="accent1"/>
+          </a:effectRef>
+          <a:fontRef idx="minor">
+            <a:schemeClr val="lt1"/>
+          </a:fontRef>
+        </p:style>
+        <p:txBody>
+          <a:bodyPr rtlCol="0" anchor="ctr"/>
+          <a:lstStyle/>
+          <a:p>
+            <a:pPr algn="ctr"/>
+          </a:p>
+        </p:txBody>
+      </p:sp>
+      <p:sp>
+        <p:nvSpPr>
+          <p:cNvPr id="9" name="TextBox 8"/>
+          <p:cNvSpPr txBox="1"/>
+          <p:nvPr/>
+        </p:nvSpPr>
+        <p:spPr>
+          <a:xfrm>
+            <a:off x="914400" y="4572000"/>
+            <a:ext cx="10360152" cy="457200"/>
+          </a:xfrm>
+          <a:prstGeom prst="rect">
+            <a:avLst/>
+          </a:prstGeom>
+          <a:noFill/>
+        </p:spPr>
+        <p:txBody>
+          <a:bodyPr wrap="square">
+            <a:spAutoFit/>
+          </a:bodyPr>
+          <a:lstStyle/>
+          <a:p>
+            <a:pPr algn="ctr"/>
+            <a:r>
+              <a:rPr sz="1300" b="0" i="1">
+                <a:solidFill>
+                  <a:srgbClr val="B0BEC5"/>
+                </a:solidFill>
+              </a:rPr>
+              <a:t>Powered by Google Earth Engine  •  Gemini 1.5 Flash  •  OpenStreetMap</a:t>
+            </a:r>
+          </a:p>
+        </p:txBody>
+      </p:sp>
+      <p:sp>
+        <p:nvSpPr>
+          <p:cNvPr id="10" name="TextBox 9"/>
+          <p:cNvSpPr txBox="1"/>
+          <p:nvPr/>
+        </p:nvSpPr>
+        <p:spPr>
+          <a:xfrm>
+            <a:off x="914400" y="6035040"/>
+            <a:ext cx="10360152" cy="457200"/>
+          </a:xfrm>
+          <a:prstGeom prst="rect">
+            <a:avLst/>
+          </a:prstGeom>
+          <a:noFill/>
+        </p:spPr>
+        <p:txBody>
+          <a:bodyPr wrap="square">
+            <a:spAutoFit/>
+          </a:bodyPr>
+          <a:lstStyle/>
+          <a:p>
+            <a:pPr algn="ctr"/>
+            <a:r>
+              <a:rPr sz="1200" b="0" i="0">
+                <a:solidFill>
+                  <a:srgbClr val="F59E0B"/>
+                </a:solidFill>
+              </a:rPr>
+              <a:t>Build with AI: Code for Communities — 2nd Edition</a:t>
             </a:r>
           </a:p>
         </p:txBody>
@@ -3150,6 +3447,14 @@
 <file path=ppt/slides/slide2.xml><?xml version="1.0" encoding="utf-8"?>
 <p:sld xmlns:a="http://schemas.openxmlformats.org/drawingml/2006/main" xmlns:p="http://schemas.openxmlformats.org/presentationml/2006/main" xmlns:r="http://schemas.openxmlformats.org/officeDocument/2006/relationships">
   <p:cSld>
+    <p:bg>
+      <p:bgPr>
+        <a:solidFill>
+          <a:srgbClr val="0F172A"/>
+        </a:solidFill>
+        <a:effectLst/>
+      </p:bgPr>
+    </p:bg>
     <p:spTree>
       <p:nvGrpSpPr>
         <p:cNvPr id="1" name=""/>
@@ -3159,52 +3464,493 @@
       <p:grpSpPr/>
       <p:sp>
         <p:nvSpPr>
-          <p:cNvPr id="2" name="Title 1"/>
-          <p:cNvSpPr>
-            <a:spLocks noGrp="1"/>
-          </p:cNvSpPr>
-          <p:nvPr>
-            <p:ph type="title"/>
-          </p:nvPr>
-        </p:nvSpPr>
-        <p:spPr/>
-        <p:txBody>
-          <a:bodyPr/>
-          <a:lstStyle/>
-          <a:p>
-            <a:r>
-              <a:t>The Problem (The Blind Spot)</a:t>
-            </a:r>
-          </a:p>
-        </p:txBody>
-      </p:sp>
-      <p:sp>
-        <p:nvSpPr>
-          <p:cNvPr id="3" name="Content Placeholder 2"/>
-          <p:cNvSpPr>
-            <a:spLocks noGrp="1"/>
-          </p:cNvSpPr>
-          <p:nvPr>
-            <p:ph idx="1"/>
-          </p:nvPr>
-        </p:nvSpPr>
-        <p:spPr/>
-        <p:txBody>
-          <a:bodyPr/>
-          <a:lstStyle/>
-          <a:p>
-            <a:r>
-              <a:t>• Broad Warnings Fail Local Needs: Weather cones don't indicate specific hyper-local impacts.</a:t>
-            </a:r>
-          </a:p>
-          <a:p>
-            <a:r>
-              <a:t>• Cascading Infrastructure Failure: Disaster commanders struggle to identify cut-off emergency shelters before flooding.</a:t>
-            </a:r>
-          </a:p>
-          <a:p>
-            <a:r>
-              <a:t>• Communication Bottleneck: Emergency officers receive raw satellite data without AI synthesis.</a:t>
+          <p:cNvPr id="2" name="Rectangle 1"/>
+          <p:cNvSpPr/>
+          <p:nvPr/>
+        </p:nvSpPr>
+        <p:spPr>
+          <a:xfrm>
+            <a:off x="0" y="0"/>
+            <a:ext cx="12188952" cy="73152"/>
+          </a:xfrm>
+          <a:prstGeom prst="rect">
+            <a:avLst/>
+          </a:prstGeom>
+          <a:solidFill>
+            <a:srgbClr val="EF4444"/>
+          </a:solidFill>
+          <a:ln>
+            <a:noFill/>
+          </a:ln>
+        </p:spPr>
+        <p:style>
+          <a:lnRef idx="1">
+            <a:schemeClr val="accent1"/>
+          </a:lnRef>
+          <a:fillRef idx="3">
+            <a:schemeClr val="accent1"/>
+          </a:fillRef>
+          <a:effectRef idx="2">
+            <a:schemeClr val="accent1"/>
+          </a:effectRef>
+          <a:fontRef idx="minor">
+            <a:schemeClr val="lt1"/>
+          </a:fontRef>
+        </p:style>
+        <p:txBody>
+          <a:bodyPr rtlCol="0" anchor="ctr"/>
+          <a:lstStyle/>
+          <a:p>
+            <a:pPr algn="ctr"/>
+          </a:p>
+        </p:txBody>
+      </p:sp>
+      <p:sp>
+        <p:nvSpPr>
+          <p:cNvPr id="3" name="Rectangle 2"/>
+          <p:cNvSpPr/>
+          <p:nvPr/>
+        </p:nvSpPr>
+        <p:spPr>
+          <a:xfrm>
+            <a:off x="0" y="914400"/>
+            <a:ext cx="54864" cy="5943600"/>
+          </a:xfrm>
+          <a:prstGeom prst="rect">
+            <a:avLst/>
+          </a:prstGeom>
+          <a:solidFill>
+            <a:srgbClr val="EF4444"/>
+          </a:solidFill>
+          <a:ln>
+            <a:noFill/>
+          </a:ln>
+        </p:spPr>
+        <p:style>
+          <a:lnRef idx="1">
+            <a:schemeClr val="accent1"/>
+          </a:lnRef>
+          <a:fillRef idx="3">
+            <a:schemeClr val="accent1"/>
+          </a:fillRef>
+          <a:effectRef idx="2">
+            <a:schemeClr val="accent1"/>
+          </a:effectRef>
+          <a:fontRef idx="minor">
+            <a:schemeClr val="lt1"/>
+          </a:fontRef>
+        </p:style>
+        <p:txBody>
+          <a:bodyPr rtlCol="0" anchor="ctr"/>
+          <a:lstStyle/>
+          <a:p>
+            <a:pPr algn="ctr"/>
+          </a:p>
+        </p:txBody>
+      </p:sp>
+      <p:sp>
+        <p:nvSpPr>
+          <p:cNvPr id="4" name="TextBox 3"/>
+          <p:cNvSpPr txBox="1"/>
+          <p:nvPr/>
+        </p:nvSpPr>
+        <p:spPr>
+          <a:xfrm>
+            <a:off x="274320" y="182880"/>
+            <a:ext cx="9144000" cy="640080"/>
+          </a:xfrm>
+          <a:prstGeom prst="rect">
+            <a:avLst/>
+          </a:prstGeom>
+          <a:noFill/>
+        </p:spPr>
+        <p:txBody>
+          <a:bodyPr wrap="square">
+            <a:spAutoFit/>
+          </a:bodyPr>
+          <a:lstStyle/>
+          <a:p>
+            <a:pPr algn="l"/>
+            <a:r>
+              <a:rPr sz="3000" b="1" i="0">
+                <a:solidFill>
+                  <a:srgbClr val="EF4444"/>
+                </a:solidFill>
+              </a:rPr>
+              <a:t>⚠  The Problem</a:t>
+            </a:r>
+          </a:p>
+        </p:txBody>
+      </p:sp>
+      <p:sp>
+        <p:nvSpPr>
+          <p:cNvPr id="5" name="TextBox 4"/>
+          <p:cNvSpPr txBox="1"/>
+          <p:nvPr/>
+        </p:nvSpPr>
+        <p:spPr>
+          <a:xfrm>
+            <a:off x="274320" y="777240"/>
+            <a:ext cx="9144000" cy="365760"/>
+          </a:xfrm>
+          <a:prstGeom prst="rect">
+            <a:avLst/>
+          </a:prstGeom>
+          <a:noFill/>
+        </p:spPr>
+        <p:txBody>
+          <a:bodyPr wrap="square">
+            <a:spAutoFit/>
+          </a:bodyPr>
+          <a:lstStyle/>
+          <a:p>
+            <a:pPr algn="l"/>
+            <a:r>
+              <a:rPr sz="1400" b="0" i="1">
+                <a:solidFill>
+                  <a:srgbClr val="B0BEC5"/>
+                </a:solidFill>
+              </a:rPr>
+              <a:t>Why generic cyclone warnings fail coastal communities</a:t>
+            </a:r>
+          </a:p>
+        </p:txBody>
+      </p:sp>
+      <p:sp>
+        <p:nvSpPr>
+          <p:cNvPr id="6" name="Rectangle 5"/>
+          <p:cNvSpPr/>
+          <p:nvPr/>
+        </p:nvSpPr>
+        <p:spPr>
+          <a:xfrm>
+            <a:off x="274320" y="1280160"/>
+            <a:ext cx="11430000" cy="1417320"/>
+          </a:xfrm>
+          <a:prstGeom prst="rect">
+            <a:avLst/>
+          </a:prstGeom>
+          <a:solidFill>
+            <a:srgbClr val="1E293B"/>
+          </a:solidFill>
+          <a:ln>
+            <a:solidFill>
+              <a:srgbClr val="EF4444"/>
+            </a:solidFill>
+          </a:ln>
+        </p:spPr>
+        <p:style>
+          <a:lnRef idx="1">
+            <a:schemeClr val="accent1"/>
+          </a:lnRef>
+          <a:fillRef idx="3">
+            <a:schemeClr val="accent1"/>
+          </a:fillRef>
+          <a:effectRef idx="2">
+            <a:schemeClr val="accent1"/>
+          </a:effectRef>
+          <a:fontRef idx="minor">
+            <a:schemeClr val="lt1"/>
+          </a:fontRef>
+        </p:style>
+        <p:txBody>
+          <a:bodyPr rtlCol="0" anchor="ctr"/>
+          <a:lstStyle/>
+          <a:p>
+            <a:pPr algn="ctr"/>
+          </a:p>
+        </p:txBody>
+      </p:sp>
+      <p:sp>
+        <p:nvSpPr>
+          <p:cNvPr id="7" name="TextBox 6"/>
+          <p:cNvSpPr txBox="1"/>
+          <p:nvPr/>
+        </p:nvSpPr>
+        <p:spPr>
+          <a:xfrm>
+            <a:off x="457200" y="1389888"/>
+            <a:ext cx="10972800" cy="411480"/>
+          </a:xfrm>
+          <a:prstGeom prst="rect">
+            <a:avLst/>
+          </a:prstGeom>
+          <a:noFill/>
+        </p:spPr>
+        <p:txBody>
+          <a:bodyPr wrap="square">
+            <a:spAutoFit/>
+          </a:bodyPr>
+          <a:lstStyle/>
+          <a:p>
+            <a:pPr algn="l"/>
+            <a:r>
+              <a:rPr sz="1500" b="1" i="0">
+                <a:solidFill>
+                  <a:srgbClr val="EF4444"/>
+                </a:solidFill>
+              </a:rPr>
+              <a:t>🎯 Blind Spot in Last-Mile Intelligence</a:t>
+            </a:r>
+          </a:p>
+        </p:txBody>
+      </p:sp>
+      <p:sp>
+        <p:nvSpPr>
+          <p:cNvPr id="8" name="TextBox 7"/>
+          <p:cNvSpPr txBox="1"/>
+          <p:nvPr/>
+        </p:nvSpPr>
+        <p:spPr>
+          <a:xfrm>
+            <a:off x="457200" y="1783080"/>
+            <a:ext cx="10972800" cy="822960"/>
+          </a:xfrm>
+          <a:prstGeom prst="rect">
+            <a:avLst/>
+          </a:prstGeom>
+          <a:noFill/>
+        </p:spPr>
+        <p:txBody>
+          <a:bodyPr wrap="square">
+            <a:spAutoFit/>
+          </a:bodyPr>
+          <a:lstStyle/>
+          <a:p>
+            <a:pPr algn="l"/>
+            <a:r>
+              <a:rPr sz="1300" b="0" i="0">
+                <a:solidFill>
+                  <a:srgbClr val="B0BEC5"/>
+                </a:solidFill>
+              </a:rPr>
+              <a:t>Weather cones cover hundreds of km² but can't tell if a specific hospital feeder road or power sub-station will be under 1.5m of water at 3 AM.</a:t>
+            </a:r>
+          </a:p>
+        </p:txBody>
+      </p:sp>
+      <p:sp>
+        <p:nvSpPr>
+          <p:cNvPr id="9" name="Rectangle 8"/>
+          <p:cNvSpPr/>
+          <p:nvPr/>
+        </p:nvSpPr>
+        <p:spPr>
+          <a:xfrm>
+            <a:off x="274320" y="2926080"/>
+            <a:ext cx="11430000" cy="1417320"/>
+          </a:xfrm>
+          <a:prstGeom prst="rect">
+            <a:avLst/>
+          </a:prstGeom>
+          <a:solidFill>
+            <a:srgbClr val="1E293B"/>
+          </a:solidFill>
+          <a:ln>
+            <a:solidFill>
+              <a:srgbClr val="EF4444"/>
+            </a:solidFill>
+          </a:ln>
+        </p:spPr>
+        <p:style>
+          <a:lnRef idx="1">
+            <a:schemeClr val="accent1"/>
+          </a:lnRef>
+          <a:fillRef idx="3">
+            <a:schemeClr val="accent1"/>
+          </a:fillRef>
+          <a:effectRef idx="2">
+            <a:schemeClr val="accent1"/>
+          </a:effectRef>
+          <a:fontRef idx="minor">
+            <a:schemeClr val="lt1"/>
+          </a:fontRef>
+        </p:style>
+        <p:txBody>
+          <a:bodyPr rtlCol="0" anchor="ctr"/>
+          <a:lstStyle/>
+          <a:p>
+            <a:pPr algn="ctr"/>
+          </a:p>
+        </p:txBody>
+      </p:sp>
+      <p:sp>
+        <p:nvSpPr>
+          <p:cNvPr id="10" name="TextBox 9"/>
+          <p:cNvSpPr txBox="1"/>
+          <p:nvPr/>
+        </p:nvSpPr>
+        <p:spPr>
+          <a:xfrm>
+            <a:off x="457200" y="3035808"/>
+            <a:ext cx="10972800" cy="411480"/>
+          </a:xfrm>
+          <a:prstGeom prst="rect">
+            <a:avLst/>
+          </a:prstGeom>
+          <a:noFill/>
+        </p:spPr>
+        <p:txBody>
+          <a:bodyPr wrap="square">
+            <a:spAutoFit/>
+          </a:bodyPr>
+          <a:lstStyle/>
+          <a:p>
+            <a:pPr algn="l"/>
+            <a:r>
+              <a:rPr sz="1500" b="1" i="0">
+                <a:solidFill>
+                  <a:srgbClr val="EF4444"/>
+                </a:solidFill>
+              </a:rPr>
+              <a:t>🔁 Cascading Infrastructure Failure</a:t>
+            </a:r>
+          </a:p>
+        </p:txBody>
+      </p:sp>
+      <p:sp>
+        <p:nvSpPr>
+          <p:cNvPr id="11" name="TextBox 10"/>
+          <p:cNvSpPr txBox="1"/>
+          <p:nvPr/>
+        </p:nvSpPr>
+        <p:spPr>
+          <a:xfrm>
+            <a:off x="457200" y="3429000"/>
+            <a:ext cx="10972800" cy="822960"/>
+          </a:xfrm>
+          <a:prstGeom prst="rect">
+            <a:avLst/>
+          </a:prstGeom>
+          <a:noFill/>
+        </p:spPr>
+        <p:txBody>
+          <a:bodyPr wrap="square">
+            <a:spAutoFit/>
+          </a:bodyPr>
+          <a:lstStyle/>
+          <a:p>
+            <a:pPr algn="l"/>
+            <a:r>
+              <a:rPr sz="1300" b="0" i="0">
+                <a:solidFill>
+                  <a:srgbClr val="B0BEC5"/>
+                </a:solidFill>
+              </a:rPr>
+              <a:t>Disaster commanders struggle to identify which emergency shelters will be cut off before flooding occurs — making pre-positioned resources impossible.</a:t>
+            </a:r>
+          </a:p>
+        </p:txBody>
+      </p:sp>
+      <p:sp>
+        <p:nvSpPr>
+          <p:cNvPr id="12" name="Rectangle 11"/>
+          <p:cNvSpPr/>
+          <p:nvPr/>
+        </p:nvSpPr>
+        <p:spPr>
+          <a:xfrm>
+            <a:off x="274320" y="4572000"/>
+            <a:ext cx="11430000" cy="1417320"/>
+          </a:xfrm>
+          <a:prstGeom prst="rect">
+            <a:avLst/>
+          </a:prstGeom>
+          <a:solidFill>
+            <a:srgbClr val="1E293B"/>
+          </a:solidFill>
+          <a:ln>
+            <a:solidFill>
+              <a:srgbClr val="EF4444"/>
+            </a:solidFill>
+          </a:ln>
+        </p:spPr>
+        <p:style>
+          <a:lnRef idx="1">
+            <a:schemeClr val="accent1"/>
+          </a:lnRef>
+          <a:fillRef idx="3">
+            <a:schemeClr val="accent1"/>
+          </a:fillRef>
+          <a:effectRef idx="2">
+            <a:schemeClr val="accent1"/>
+          </a:effectRef>
+          <a:fontRef idx="minor">
+            <a:schemeClr val="lt1"/>
+          </a:fontRef>
+        </p:style>
+        <p:txBody>
+          <a:bodyPr rtlCol="0" anchor="ctr"/>
+          <a:lstStyle/>
+          <a:p>
+            <a:pPr algn="ctr"/>
+          </a:p>
+        </p:txBody>
+      </p:sp>
+      <p:sp>
+        <p:nvSpPr>
+          <p:cNvPr id="13" name="TextBox 12"/>
+          <p:cNvSpPr txBox="1"/>
+          <p:nvPr/>
+        </p:nvSpPr>
+        <p:spPr>
+          <a:xfrm>
+            <a:off x="457200" y="4681728"/>
+            <a:ext cx="10972800" cy="411480"/>
+          </a:xfrm>
+          <a:prstGeom prst="rect">
+            <a:avLst/>
+          </a:prstGeom>
+          <a:noFill/>
+        </p:spPr>
+        <p:txBody>
+          <a:bodyPr wrap="square">
+            <a:spAutoFit/>
+          </a:bodyPr>
+          <a:lstStyle/>
+          <a:p>
+            <a:pPr algn="l"/>
+            <a:r>
+              <a:rPr sz="1500" b="1" i="0">
+                <a:solidFill>
+                  <a:srgbClr val="EF4444"/>
+                </a:solidFill>
+              </a:rPr>
+              <a:t>📡 Communication Bottleneck</a:t>
+            </a:r>
+          </a:p>
+        </p:txBody>
+      </p:sp>
+      <p:sp>
+        <p:nvSpPr>
+          <p:cNvPr id="14" name="TextBox 13"/>
+          <p:cNvSpPr txBox="1"/>
+          <p:nvPr/>
+        </p:nvSpPr>
+        <p:spPr>
+          <a:xfrm>
+            <a:off x="457200" y="5074920"/>
+            <a:ext cx="10972800" cy="822960"/>
+          </a:xfrm>
+          <a:prstGeom prst="rect">
+            <a:avLst/>
+          </a:prstGeom>
+          <a:noFill/>
+        </p:spPr>
+        <p:txBody>
+          <a:bodyPr wrap="square">
+            <a:spAutoFit/>
+          </a:bodyPr>
+          <a:lstStyle/>
+          <a:p>
+            <a:pPr algn="l"/>
+            <a:r>
+              <a:rPr sz="1300" b="0" i="0">
+                <a:solidFill>
+                  <a:srgbClr val="B0BEC5"/>
+                </a:solidFill>
+              </a:rPr>
+              <a:t>Emergency officers receive raw satellite imagery without AI synthesis into immediate, localized, multi-lingual tactical actions.</a:t>
             </a:r>
           </a:p>
         </p:txBody>
@@ -3220,6 +3966,14 @@
 <file path=ppt/slides/slide3.xml><?xml version="1.0" encoding="utf-8"?>
 <p:sld xmlns:a="http://schemas.openxmlformats.org/drawingml/2006/main" xmlns:p="http://schemas.openxmlformats.org/presentationml/2006/main" xmlns:r="http://schemas.openxmlformats.org/officeDocument/2006/relationships">
   <p:cSld>
+    <p:bg>
+      <p:bgPr>
+        <a:solidFill>
+          <a:srgbClr val="0F172A"/>
+        </a:solidFill>
+        <a:effectLst/>
+      </p:bgPr>
+    </p:bg>
     <p:spTree>
       <p:nvGrpSpPr>
         <p:cNvPr id="1" name=""/>
@@ -3229,62 +3983,1046 @@
       <p:grpSpPr/>
       <p:sp>
         <p:nvSpPr>
-          <p:cNvPr id="2" name="Title 1"/>
-          <p:cNvSpPr>
-            <a:spLocks noGrp="1"/>
-          </p:cNvSpPr>
-          <p:nvPr>
-            <p:ph type="title"/>
-          </p:nvPr>
-        </p:nvSpPr>
-        <p:spPr/>
-        <p:txBody>
-          <a:bodyPr/>
-          <a:lstStyle/>
-          <a:p>
-            <a:r>
-              <a:t>The Solution - ResiliTrack AI</a:t>
-            </a:r>
-          </a:p>
-        </p:txBody>
-      </p:sp>
-      <p:sp>
-        <p:nvSpPr>
-          <p:cNvPr id="3" name="Content Placeholder 2"/>
-          <p:cNvSpPr>
-            <a:spLocks noGrp="1"/>
-          </p:cNvSpPr>
-          <p:nvPr>
-            <p:ph idx="1"/>
-          </p:nvPr>
-        </p:nvSpPr>
-        <p:spPr/>
-        <p:txBody>
-          <a:bodyPr/>
-          <a:lstStyle/>
-          <a:p>
-            <a:r>
-              <a:t>• What it is: AI-powered predictive risk platform.</a:t>
-            </a:r>
-          </a:p>
-          <a:p>
-            <a:r>
-              <a:t>• Simulate: Hydro-Elevation mapping using Google Earth Engine.</a:t>
-            </a:r>
-          </a:p>
-          <a:p>
-            <a:r>
-              <a:t>• Analyze: Critical Infrastructure Exposure Graph.</a:t>
-            </a:r>
-          </a:p>
-          <a:p>
-            <a:r>
-              <a:t>• Act: Gemini Multimodal Operations Intelligence.</a:t>
-            </a:r>
-          </a:p>
-          <a:p>
-            <a:r>
-              <a:t>• Fund: Pre-Landfall Parametric Insurance Triggers.</a:t>
+          <p:cNvPr id="2" name="Rectangle 1"/>
+          <p:cNvSpPr/>
+          <p:nvPr/>
+        </p:nvSpPr>
+        <p:spPr>
+          <a:xfrm>
+            <a:off x="0" y="0"/>
+            <a:ext cx="12188952" cy="73152"/>
+          </a:xfrm>
+          <a:prstGeom prst="rect">
+            <a:avLst/>
+          </a:prstGeom>
+          <a:solidFill>
+            <a:srgbClr val="1E88E5"/>
+          </a:solidFill>
+          <a:ln>
+            <a:noFill/>
+          </a:ln>
+        </p:spPr>
+        <p:style>
+          <a:lnRef idx="1">
+            <a:schemeClr val="accent1"/>
+          </a:lnRef>
+          <a:fillRef idx="3">
+            <a:schemeClr val="accent1"/>
+          </a:fillRef>
+          <a:effectRef idx="2">
+            <a:schemeClr val="accent1"/>
+          </a:effectRef>
+          <a:fontRef idx="minor">
+            <a:schemeClr val="lt1"/>
+          </a:fontRef>
+        </p:style>
+        <p:txBody>
+          <a:bodyPr rtlCol="0" anchor="ctr"/>
+          <a:lstStyle/>
+          <a:p>
+            <a:pPr algn="ctr"/>
+          </a:p>
+        </p:txBody>
+      </p:sp>
+      <p:sp>
+        <p:nvSpPr>
+          <p:cNvPr id="3" name="Rectangle 2"/>
+          <p:cNvSpPr/>
+          <p:nvPr/>
+        </p:nvSpPr>
+        <p:spPr>
+          <a:xfrm>
+            <a:off x="0" y="914400"/>
+            <a:ext cx="54864" cy="5943600"/>
+          </a:xfrm>
+          <a:prstGeom prst="rect">
+            <a:avLst/>
+          </a:prstGeom>
+          <a:solidFill>
+            <a:srgbClr val="1E88E5"/>
+          </a:solidFill>
+          <a:ln>
+            <a:noFill/>
+          </a:ln>
+        </p:spPr>
+        <p:style>
+          <a:lnRef idx="1">
+            <a:schemeClr val="accent1"/>
+          </a:lnRef>
+          <a:fillRef idx="3">
+            <a:schemeClr val="accent1"/>
+          </a:fillRef>
+          <a:effectRef idx="2">
+            <a:schemeClr val="accent1"/>
+          </a:effectRef>
+          <a:fontRef idx="minor">
+            <a:schemeClr val="lt1"/>
+          </a:fontRef>
+        </p:style>
+        <p:txBody>
+          <a:bodyPr rtlCol="0" anchor="ctr"/>
+          <a:lstStyle/>
+          <a:p>
+            <a:pPr algn="ctr"/>
+          </a:p>
+        </p:txBody>
+      </p:sp>
+      <p:sp>
+        <p:nvSpPr>
+          <p:cNvPr id="4" name="TextBox 3"/>
+          <p:cNvSpPr txBox="1"/>
+          <p:nvPr/>
+        </p:nvSpPr>
+        <p:spPr>
+          <a:xfrm>
+            <a:off x="274320" y="137160"/>
+            <a:ext cx="10058400" cy="640080"/>
+          </a:xfrm>
+          <a:prstGeom prst="rect">
+            <a:avLst/>
+          </a:prstGeom>
+          <a:noFill/>
+        </p:spPr>
+        <p:txBody>
+          <a:bodyPr wrap="square">
+            <a:spAutoFit/>
+          </a:bodyPr>
+          <a:lstStyle/>
+          <a:p>
+            <a:pPr algn="l"/>
+            <a:r>
+              <a:rPr sz="3000" b="1" i="0">
+                <a:solidFill>
+                  <a:srgbClr val="1E88E5"/>
+                </a:solidFill>
+              </a:rPr>
+              <a:t>💡 The Solution — ResiliTrack AI</a:t>
+            </a:r>
+          </a:p>
+        </p:txBody>
+      </p:sp>
+      <p:sp>
+        <p:nvSpPr>
+          <p:cNvPr id="5" name="TextBox 4"/>
+          <p:cNvSpPr txBox="1"/>
+          <p:nvPr/>
+        </p:nvSpPr>
+        <p:spPr>
+          <a:xfrm>
+            <a:off x="274320" y="731520"/>
+            <a:ext cx="10972800" cy="365760"/>
+          </a:xfrm>
+          <a:prstGeom prst="rect">
+            <a:avLst/>
+          </a:prstGeom>
+          <a:noFill/>
+        </p:spPr>
+        <p:txBody>
+          <a:bodyPr wrap="square">
+            <a:spAutoFit/>
+          </a:bodyPr>
+          <a:lstStyle/>
+          <a:p>
+            <a:pPr algn="l"/>
+            <a:r>
+              <a:rPr sz="1400" b="0" i="1">
+                <a:solidFill>
+                  <a:srgbClr val="B0BEC5"/>
+                </a:solidFill>
+              </a:rPr>
+              <a:t>Shifting disaster response from reactive recovery to anticipatory pre-landfall action</a:t>
+            </a:r>
+          </a:p>
+        </p:txBody>
+      </p:sp>
+      <p:sp>
+        <p:nvSpPr>
+          <p:cNvPr id="6" name="Rectangle 5"/>
+          <p:cNvSpPr/>
+          <p:nvPr/>
+        </p:nvSpPr>
+        <p:spPr>
+          <a:xfrm>
+            <a:off x="274320" y="1280160"/>
+            <a:ext cx="2743200" cy="5303520"/>
+          </a:xfrm>
+          <a:prstGeom prst="rect">
+            <a:avLst/>
+          </a:prstGeom>
+          <a:solidFill>
+            <a:srgbClr val="1E293B"/>
+          </a:solidFill>
+          <a:ln>
+            <a:noFill/>
+          </a:ln>
+        </p:spPr>
+        <p:style>
+          <a:lnRef idx="1">
+            <a:schemeClr val="accent1"/>
+          </a:lnRef>
+          <a:fillRef idx="3">
+            <a:schemeClr val="accent1"/>
+          </a:fillRef>
+          <a:effectRef idx="2">
+            <a:schemeClr val="accent1"/>
+          </a:effectRef>
+          <a:fontRef idx="minor">
+            <a:schemeClr val="lt1"/>
+          </a:fontRef>
+        </p:style>
+        <p:txBody>
+          <a:bodyPr rtlCol="0" anchor="ctr"/>
+          <a:lstStyle/>
+          <a:p>
+            <a:pPr algn="ctr"/>
+          </a:p>
+        </p:txBody>
+      </p:sp>
+      <p:sp>
+        <p:nvSpPr>
+          <p:cNvPr id="7" name="Rectangle 6"/>
+          <p:cNvSpPr/>
+          <p:nvPr/>
+        </p:nvSpPr>
+        <p:spPr>
+          <a:xfrm>
+            <a:off x="274320" y="1280160"/>
+            <a:ext cx="2743200" cy="54864"/>
+          </a:xfrm>
+          <a:prstGeom prst="rect">
+            <a:avLst/>
+          </a:prstGeom>
+          <a:solidFill>
+            <a:srgbClr val="1E88E5"/>
+          </a:solidFill>
+          <a:ln>
+            <a:noFill/>
+          </a:ln>
+        </p:spPr>
+        <p:style>
+          <a:lnRef idx="1">
+            <a:schemeClr val="accent1"/>
+          </a:lnRef>
+          <a:fillRef idx="3">
+            <a:schemeClr val="accent1"/>
+          </a:fillRef>
+          <a:effectRef idx="2">
+            <a:schemeClr val="accent1"/>
+          </a:effectRef>
+          <a:fontRef idx="minor">
+            <a:schemeClr val="lt1"/>
+          </a:fontRef>
+        </p:style>
+        <p:txBody>
+          <a:bodyPr rtlCol="0" anchor="ctr"/>
+          <a:lstStyle/>
+          <a:p>
+            <a:pPr algn="ctr"/>
+          </a:p>
+        </p:txBody>
+      </p:sp>
+      <p:sp>
+        <p:nvSpPr>
+          <p:cNvPr id="8" name="TextBox 7"/>
+          <p:cNvSpPr txBox="1"/>
+          <p:nvPr/>
+        </p:nvSpPr>
+        <p:spPr>
+          <a:xfrm>
+            <a:off x="274320" y="1417320"/>
+            <a:ext cx="2743200" cy="640080"/>
+          </a:xfrm>
+          <a:prstGeom prst="rect">
+            <a:avLst/>
+          </a:prstGeom>
+          <a:noFill/>
+        </p:spPr>
+        <p:txBody>
+          <a:bodyPr wrap="square">
+            <a:spAutoFit/>
+          </a:bodyPr>
+          <a:lstStyle/>
+          <a:p>
+            <a:pPr algn="ctr"/>
+            <a:r>
+              <a:rPr sz="2800" b="0" i="0">
+                <a:solidFill>
+                  <a:srgbClr val="FFFFFF"/>
+                </a:solidFill>
+              </a:rPr>
+              <a:t>🌊</a:t>
+            </a:r>
+          </a:p>
+        </p:txBody>
+      </p:sp>
+      <p:sp>
+        <p:nvSpPr>
+          <p:cNvPr id="9" name="TextBox 8"/>
+          <p:cNvSpPr txBox="1"/>
+          <p:nvPr/>
+        </p:nvSpPr>
+        <p:spPr>
+          <a:xfrm>
+            <a:off x="274320" y="2103120"/>
+            <a:ext cx="2743200" cy="365760"/>
+          </a:xfrm>
+          <a:prstGeom prst="rect">
+            <a:avLst/>
+          </a:prstGeom>
+          <a:noFill/>
+        </p:spPr>
+        <p:txBody>
+          <a:bodyPr wrap="square">
+            <a:spAutoFit/>
+          </a:bodyPr>
+          <a:lstStyle/>
+          <a:p>
+            <a:pPr algn="ctr"/>
+            <a:r>
+              <a:rPr sz="1000" b="1" i="0">
+                <a:solidFill>
+                  <a:srgbClr val="1E88E5"/>
+                </a:solidFill>
+              </a:rPr>
+              <a:t>SIMULATE</a:t>
+            </a:r>
+          </a:p>
+        </p:txBody>
+      </p:sp>
+      <p:sp>
+        <p:nvSpPr>
+          <p:cNvPr id="10" name="TextBox 9"/>
+          <p:cNvSpPr txBox="1"/>
+          <p:nvPr/>
+        </p:nvSpPr>
+        <p:spPr>
+          <a:xfrm>
+            <a:off x="274320" y="2468880"/>
+            <a:ext cx="2743200" cy="457200"/>
+          </a:xfrm>
+          <a:prstGeom prst="rect">
+            <a:avLst/>
+          </a:prstGeom>
+          <a:noFill/>
+        </p:spPr>
+        <p:txBody>
+          <a:bodyPr wrap="square">
+            <a:spAutoFit/>
+          </a:bodyPr>
+          <a:lstStyle/>
+          <a:p>
+            <a:pPr algn="ctr"/>
+            <a:r>
+              <a:rPr sz="1300" b="1" i="0">
+                <a:solidFill>
+                  <a:srgbClr val="FFFFFF"/>
+                </a:solidFill>
+              </a:rPr>
+              <a:t>Hydro-Elevation Mapping</a:t>
+            </a:r>
+          </a:p>
+        </p:txBody>
+      </p:sp>
+      <p:sp>
+        <p:nvSpPr>
+          <p:cNvPr id="11" name="TextBox 10"/>
+          <p:cNvSpPr txBox="1"/>
+          <p:nvPr/>
+        </p:nvSpPr>
+        <p:spPr>
+          <a:xfrm>
+            <a:off x="365760" y="2971800"/>
+            <a:ext cx="2560320" cy="1371600"/>
+          </a:xfrm>
+          <a:prstGeom prst="rect">
+            <a:avLst/>
+          </a:prstGeom>
+          <a:noFill/>
+        </p:spPr>
+        <p:txBody>
+          <a:bodyPr wrap="square">
+            <a:spAutoFit/>
+          </a:bodyPr>
+          <a:lstStyle/>
+          <a:p>
+            <a:pPr algn="ctr"/>
+            <a:r>
+              <a:rPr sz="1100" b="0" i="0">
+                <a:solidFill>
+                  <a:srgbClr val="B0BEC5"/>
+                </a:solidFill>
+              </a:rPr>
+              <a:t>GEE NASADEM/SRTM elevation matrices combined
+with wind speed &amp; 24h rainfall accumulation.</a:t>
+            </a:r>
+          </a:p>
+        </p:txBody>
+      </p:sp>
+      <p:sp>
+        <p:nvSpPr>
+          <p:cNvPr id="12" name="Rectangle 11"/>
+          <p:cNvSpPr/>
+          <p:nvPr/>
+        </p:nvSpPr>
+        <p:spPr>
+          <a:xfrm>
+            <a:off x="3218688" y="1280160"/>
+            <a:ext cx="2743200" cy="5303520"/>
+          </a:xfrm>
+          <a:prstGeom prst="rect">
+            <a:avLst/>
+          </a:prstGeom>
+          <a:solidFill>
+            <a:srgbClr val="1E293B"/>
+          </a:solidFill>
+          <a:ln>
+            <a:noFill/>
+          </a:ln>
+        </p:spPr>
+        <p:style>
+          <a:lnRef idx="1">
+            <a:schemeClr val="accent1"/>
+          </a:lnRef>
+          <a:fillRef idx="3">
+            <a:schemeClr val="accent1"/>
+          </a:fillRef>
+          <a:effectRef idx="2">
+            <a:schemeClr val="accent1"/>
+          </a:effectRef>
+          <a:fontRef idx="minor">
+            <a:schemeClr val="lt1"/>
+          </a:fontRef>
+        </p:style>
+        <p:txBody>
+          <a:bodyPr rtlCol="0" anchor="ctr"/>
+          <a:lstStyle/>
+          <a:p>
+            <a:pPr algn="ctr"/>
+          </a:p>
+        </p:txBody>
+      </p:sp>
+      <p:sp>
+        <p:nvSpPr>
+          <p:cNvPr id="13" name="Rectangle 12"/>
+          <p:cNvSpPr/>
+          <p:nvPr/>
+        </p:nvSpPr>
+        <p:spPr>
+          <a:xfrm>
+            <a:off x="3218688" y="1280160"/>
+            <a:ext cx="2743200" cy="54864"/>
+          </a:xfrm>
+          <a:prstGeom prst="rect">
+            <a:avLst/>
+          </a:prstGeom>
+          <a:solidFill>
+            <a:srgbClr val="38BDF8"/>
+          </a:solidFill>
+          <a:ln>
+            <a:noFill/>
+          </a:ln>
+        </p:spPr>
+        <p:style>
+          <a:lnRef idx="1">
+            <a:schemeClr val="accent1"/>
+          </a:lnRef>
+          <a:fillRef idx="3">
+            <a:schemeClr val="accent1"/>
+          </a:fillRef>
+          <a:effectRef idx="2">
+            <a:schemeClr val="accent1"/>
+          </a:effectRef>
+          <a:fontRef idx="minor">
+            <a:schemeClr val="lt1"/>
+          </a:fontRef>
+        </p:style>
+        <p:txBody>
+          <a:bodyPr rtlCol="0" anchor="ctr"/>
+          <a:lstStyle/>
+          <a:p>
+            <a:pPr algn="ctr"/>
+          </a:p>
+        </p:txBody>
+      </p:sp>
+      <p:sp>
+        <p:nvSpPr>
+          <p:cNvPr id="14" name="TextBox 13"/>
+          <p:cNvSpPr txBox="1"/>
+          <p:nvPr/>
+        </p:nvSpPr>
+        <p:spPr>
+          <a:xfrm>
+            <a:off x="3218688" y="1417320"/>
+            <a:ext cx="2743200" cy="640080"/>
+          </a:xfrm>
+          <a:prstGeom prst="rect">
+            <a:avLst/>
+          </a:prstGeom>
+          <a:noFill/>
+        </p:spPr>
+        <p:txBody>
+          <a:bodyPr wrap="square">
+            <a:spAutoFit/>
+          </a:bodyPr>
+          <a:lstStyle/>
+          <a:p>
+            <a:pPr algn="ctr"/>
+            <a:r>
+              <a:rPr sz="2800" b="0" i="0">
+                <a:solidFill>
+                  <a:srgbClr val="FFFFFF"/>
+                </a:solidFill>
+              </a:rPr>
+              <a:t>🏥</a:t>
+            </a:r>
+          </a:p>
+        </p:txBody>
+      </p:sp>
+      <p:sp>
+        <p:nvSpPr>
+          <p:cNvPr id="15" name="TextBox 14"/>
+          <p:cNvSpPr txBox="1"/>
+          <p:nvPr/>
+        </p:nvSpPr>
+        <p:spPr>
+          <a:xfrm>
+            <a:off x="3218688" y="2103120"/>
+            <a:ext cx="2743200" cy="365760"/>
+          </a:xfrm>
+          <a:prstGeom prst="rect">
+            <a:avLst/>
+          </a:prstGeom>
+          <a:noFill/>
+        </p:spPr>
+        <p:txBody>
+          <a:bodyPr wrap="square">
+            <a:spAutoFit/>
+          </a:bodyPr>
+          <a:lstStyle/>
+          <a:p>
+            <a:pPr algn="ctr"/>
+            <a:r>
+              <a:rPr sz="1000" b="1" i="0">
+                <a:solidFill>
+                  <a:srgbClr val="38BDF8"/>
+                </a:solidFill>
+              </a:rPr>
+              <a:t>ANALYZE</a:t>
+            </a:r>
+          </a:p>
+        </p:txBody>
+      </p:sp>
+      <p:sp>
+        <p:nvSpPr>
+          <p:cNvPr id="16" name="TextBox 15"/>
+          <p:cNvSpPr txBox="1"/>
+          <p:nvPr/>
+        </p:nvSpPr>
+        <p:spPr>
+          <a:xfrm>
+            <a:off x="3218688" y="2468880"/>
+            <a:ext cx="2743200" cy="457200"/>
+          </a:xfrm>
+          <a:prstGeom prst="rect">
+            <a:avLst/>
+          </a:prstGeom>
+          <a:noFill/>
+        </p:spPr>
+        <p:txBody>
+          <a:bodyPr wrap="square">
+            <a:spAutoFit/>
+          </a:bodyPr>
+          <a:lstStyle/>
+          <a:p>
+            <a:pPr algn="ctr"/>
+            <a:r>
+              <a:rPr sz="1300" b="1" i="0">
+                <a:solidFill>
+                  <a:srgbClr val="FFFFFF"/>
+                </a:solidFill>
+              </a:rPr>
+              <a:t>Infrastructure Exposure Graph</a:t>
+            </a:r>
+          </a:p>
+        </p:txBody>
+      </p:sp>
+      <p:sp>
+        <p:nvSpPr>
+          <p:cNvPr id="17" name="TextBox 16"/>
+          <p:cNvSpPr txBox="1"/>
+          <p:nvPr/>
+        </p:nvSpPr>
+        <p:spPr>
+          <a:xfrm>
+            <a:off x="3310128" y="2971800"/>
+            <a:ext cx="2560320" cy="1371600"/>
+          </a:xfrm>
+          <a:prstGeom prst="rect">
+            <a:avLst/>
+          </a:prstGeom>
+          <a:noFill/>
+        </p:spPr>
+        <p:txBody>
+          <a:bodyPr wrap="square">
+            <a:spAutoFit/>
+          </a:bodyPr>
+          <a:lstStyle/>
+          <a:p>
+            <a:pPr algn="ctr"/>
+            <a:r>
+              <a:rPr sz="1100" b="0" i="0">
+                <a:solidFill>
+                  <a:srgbClr val="B0BEC5"/>
+                </a:solidFill>
+              </a:rPr>
+              <a:t>Extracts hospitals, power grids, bridges from
+OpenStreetMap — calculates accessibility decay.</a:t>
+            </a:r>
+          </a:p>
+        </p:txBody>
+      </p:sp>
+      <p:sp>
+        <p:nvSpPr>
+          <p:cNvPr id="18" name="Rectangle 17"/>
+          <p:cNvSpPr/>
+          <p:nvPr/>
+        </p:nvSpPr>
+        <p:spPr>
+          <a:xfrm>
+            <a:off x="6163056" y="1280160"/>
+            <a:ext cx="2743200" cy="5303520"/>
+          </a:xfrm>
+          <a:prstGeom prst="rect">
+            <a:avLst/>
+          </a:prstGeom>
+          <a:solidFill>
+            <a:srgbClr val="1E293B"/>
+          </a:solidFill>
+          <a:ln>
+            <a:noFill/>
+          </a:ln>
+        </p:spPr>
+        <p:style>
+          <a:lnRef idx="1">
+            <a:schemeClr val="accent1"/>
+          </a:lnRef>
+          <a:fillRef idx="3">
+            <a:schemeClr val="accent1"/>
+          </a:fillRef>
+          <a:effectRef idx="2">
+            <a:schemeClr val="accent1"/>
+          </a:effectRef>
+          <a:fontRef idx="minor">
+            <a:schemeClr val="lt1"/>
+          </a:fontRef>
+        </p:style>
+        <p:txBody>
+          <a:bodyPr rtlCol="0" anchor="ctr"/>
+          <a:lstStyle/>
+          <a:p>
+            <a:pPr algn="ctr"/>
+          </a:p>
+        </p:txBody>
+      </p:sp>
+      <p:sp>
+        <p:nvSpPr>
+          <p:cNvPr id="19" name="Rectangle 18"/>
+          <p:cNvSpPr/>
+          <p:nvPr/>
+        </p:nvSpPr>
+        <p:spPr>
+          <a:xfrm>
+            <a:off x="6163056" y="1280160"/>
+            <a:ext cx="2743200" cy="54864"/>
+          </a:xfrm>
+          <a:prstGeom prst="rect">
+            <a:avLst/>
+          </a:prstGeom>
+          <a:solidFill>
+            <a:srgbClr val="10B981"/>
+          </a:solidFill>
+          <a:ln>
+            <a:noFill/>
+          </a:ln>
+        </p:spPr>
+        <p:style>
+          <a:lnRef idx="1">
+            <a:schemeClr val="accent1"/>
+          </a:lnRef>
+          <a:fillRef idx="3">
+            <a:schemeClr val="accent1"/>
+          </a:fillRef>
+          <a:effectRef idx="2">
+            <a:schemeClr val="accent1"/>
+          </a:effectRef>
+          <a:fontRef idx="minor">
+            <a:schemeClr val="lt1"/>
+          </a:fontRef>
+        </p:style>
+        <p:txBody>
+          <a:bodyPr rtlCol="0" anchor="ctr"/>
+          <a:lstStyle/>
+          <a:p>
+            <a:pPr algn="ctr"/>
+          </a:p>
+        </p:txBody>
+      </p:sp>
+      <p:sp>
+        <p:nvSpPr>
+          <p:cNvPr id="20" name="TextBox 19"/>
+          <p:cNvSpPr txBox="1"/>
+          <p:nvPr/>
+        </p:nvSpPr>
+        <p:spPr>
+          <a:xfrm>
+            <a:off x="6163056" y="1417320"/>
+            <a:ext cx="2743200" cy="640080"/>
+          </a:xfrm>
+          <a:prstGeom prst="rect">
+            <a:avLst/>
+          </a:prstGeom>
+          <a:noFill/>
+        </p:spPr>
+        <p:txBody>
+          <a:bodyPr wrap="square">
+            <a:spAutoFit/>
+          </a:bodyPr>
+          <a:lstStyle/>
+          <a:p>
+            <a:pPr algn="ctr"/>
+            <a:r>
+              <a:rPr sz="2800" b="0" i="0">
+                <a:solidFill>
+                  <a:srgbClr val="FFFFFF"/>
+                </a:solidFill>
+              </a:rPr>
+              <a:t>🧠</a:t>
+            </a:r>
+          </a:p>
+        </p:txBody>
+      </p:sp>
+      <p:sp>
+        <p:nvSpPr>
+          <p:cNvPr id="21" name="TextBox 20"/>
+          <p:cNvSpPr txBox="1"/>
+          <p:nvPr/>
+        </p:nvSpPr>
+        <p:spPr>
+          <a:xfrm>
+            <a:off x="6163056" y="2103120"/>
+            <a:ext cx="2743200" cy="365760"/>
+          </a:xfrm>
+          <a:prstGeom prst="rect">
+            <a:avLst/>
+          </a:prstGeom>
+          <a:noFill/>
+        </p:spPr>
+        <p:txBody>
+          <a:bodyPr wrap="square">
+            <a:spAutoFit/>
+          </a:bodyPr>
+          <a:lstStyle/>
+          <a:p>
+            <a:pPr algn="ctr"/>
+            <a:r>
+              <a:rPr sz="1000" b="1" i="0">
+                <a:solidFill>
+                  <a:srgbClr val="10B981"/>
+                </a:solidFill>
+              </a:rPr>
+              <a:t>DECIDE</a:t>
+            </a:r>
+          </a:p>
+        </p:txBody>
+      </p:sp>
+      <p:sp>
+        <p:nvSpPr>
+          <p:cNvPr id="22" name="TextBox 21"/>
+          <p:cNvSpPr txBox="1"/>
+          <p:nvPr/>
+        </p:nvSpPr>
+        <p:spPr>
+          <a:xfrm>
+            <a:off x="6163056" y="2468880"/>
+            <a:ext cx="2743200" cy="457200"/>
+          </a:xfrm>
+          <a:prstGeom prst="rect">
+            <a:avLst/>
+          </a:prstGeom>
+          <a:noFill/>
+        </p:spPr>
+        <p:txBody>
+          <a:bodyPr wrap="square">
+            <a:spAutoFit/>
+          </a:bodyPr>
+          <a:lstStyle/>
+          <a:p>
+            <a:pPr algn="ctr"/>
+            <a:r>
+              <a:rPr sz="1300" b="1" i="0">
+                <a:solidFill>
+                  <a:srgbClr val="FFFFFF"/>
+                </a:solidFill>
+              </a:rPr>
+              <a:t>Gemini AI Operations Intel</a:t>
+            </a:r>
+          </a:p>
+        </p:txBody>
+      </p:sp>
+      <p:sp>
+        <p:nvSpPr>
+          <p:cNvPr id="23" name="TextBox 22"/>
+          <p:cNvSpPr txBox="1"/>
+          <p:nvPr/>
+        </p:nvSpPr>
+        <p:spPr>
+          <a:xfrm>
+            <a:off x="6254496" y="2971800"/>
+            <a:ext cx="2560320" cy="1371600"/>
+          </a:xfrm>
+          <a:prstGeom prst="rect">
+            <a:avLst/>
+          </a:prstGeom>
+          <a:noFill/>
+        </p:spPr>
+        <p:txBody>
+          <a:bodyPr wrap="square">
+            <a:spAutoFit/>
+          </a:bodyPr>
+          <a:lstStyle/>
+          <a:p>
+            <a:pPr algn="ctr"/>
+            <a:r>
+              <a:rPr sz="1100" b="0" i="0">
+                <a:solidFill>
+                  <a:srgbClr val="B0BEC5"/>
+                </a:solidFill>
+              </a:rPr>
+              <a:t>Synthesizes satellite maps + telemetry into
+executive reports &amp; multi-lingual alerts.</a:t>
+            </a:r>
+          </a:p>
+        </p:txBody>
+      </p:sp>
+      <p:sp>
+        <p:nvSpPr>
+          <p:cNvPr id="24" name="Rectangle 23"/>
+          <p:cNvSpPr/>
+          <p:nvPr/>
+        </p:nvSpPr>
+        <p:spPr>
+          <a:xfrm>
+            <a:off x="9107424" y="1280160"/>
+            <a:ext cx="2743200" cy="5303520"/>
+          </a:xfrm>
+          <a:prstGeom prst="rect">
+            <a:avLst/>
+          </a:prstGeom>
+          <a:solidFill>
+            <a:srgbClr val="1E293B"/>
+          </a:solidFill>
+          <a:ln>
+            <a:noFill/>
+          </a:ln>
+        </p:spPr>
+        <p:style>
+          <a:lnRef idx="1">
+            <a:schemeClr val="accent1"/>
+          </a:lnRef>
+          <a:fillRef idx="3">
+            <a:schemeClr val="accent1"/>
+          </a:fillRef>
+          <a:effectRef idx="2">
+            <a:schemeClr val="accent1"/>
+          </a:effectRef>
+          <a:fontRef idx="minor">
+            <a:schemeClr val="lt1"/>
+          </a:fontRef>
+        </p:style>
+        <p:txBody>
+          <a:bodyPr rtlCol="0" anchor="ctr"/>
+          <a:lstStyle/>
+          <a:p>
+            <a:pPr algn="ctr"/>
+          </a:p>
+        </p:txBody>
+      </p:sp>
+      <p:sp>
+        <p:nvSpPr>
+          <p:cNvPr id="25" name="Rectangle 24"/>
+          <p:cNvSpPr/>
+          <p:nvPr/>
+        </p:nvSpPr>
+        <p:spPr>
+          <a:xfrm>
+            <a:off x="9107424" y="1280160"/>
+            <a:ext cx="2743200" cy="54864"/>
+          </a:xfrm>
+          <a:prstGeom prst="rect">
+            <a:avLst/>
+          </a:prstGeom>
+          <a:solidFill>
+            <a:srgbClr val="F59E0B"/>
+          </a:solidFill>
+          <a:ln>
+            <a:noFill/>
+          </a:ln>
+        </p:spPr>
+        <p:style>
+          <a:lnRef idx="1">
+            <a:schemeClr val="accent1"/>
+          </a:lnRef>
+          <a:fillRef idx="3">
+            <a:schemeClr val="accent1"/>
+          </a:fillRef>
+          <a:effectRef idx="2">
+            <a:schemeClr val="accent1"/>
+          </a:effectRef>
+          <a:fontRef idx="minor">
+            <a:schemeClr val="lt1"/>
+          </a:fontRef>
+        </p:style>
+        <p:txBody>
+          <a:bodyPr rtlCol="0" anchor="ctr"/>
+          <a:lstStyle/>
+          <a:p>
+            <a:pPr algn="ctr"/>
+          </a:p>
+        </p:txBody>
+      </p:sp>
+      <p:sp>
+        <p:nvSpPr>
+          <p:cNvPr id="26" name="TextBox 25"/>
+          <p:cNvSpPr txBox="1"/>
+          <p:nvPr/>
+        </p:nvSpPr>
+        <p:spPr>
+          <a:xfrm>
+            <a:off x="9107424" y="1417320"/>
+            <a:ext cx="2743200" cy="640080"/>
+          </a:xfrm>
+          <a:prstGeom prst="rect">
+            <a:avLst/>
+          </a:prstGeom>
+          <a:noFill/>
+        </p:spPr>
+        <p:txBody>
+          <a:bodyPr wrap="square">
+            <a:spAutoFit/>
+          </a:bodyPr>
+          <a:lstStyle/>
+          <a:p>
+            <a:pPr algn="ctr"/>
+            <a:r>
+              <a:rPr sz="2800" b="0" i="0">
+                <a:solidFill>
+                  <a:srgbClr val="FFFFFF"/>
+                </a:solidFill>
+              </a:rPr>
+              <a:t>💳</a:t>
+            </a:r>
+          </a:p>
+        </p:txBody>
+      </p:sp>
+      <p:sp>
+        <p:nvSpPr>
+          <p:cNvPr id="27" name="TextBox 26"/>
+          <p:cNvSpPr txBox="1"/>
+          <p:nvPr/>
+        </p:nvSpPr>
+        <p:spPr>
+          <a:xfrm>
+            <a:off x="9107424" y="2103120"/>
+            <a:ext cx="2743200" cy="365760"/>
+          </a:xfrm>
+          <a:prstGeom prst="rect">
+            <a:avLst/>
+          </a:prstGeom>
+          <a:noFill/>
+        </p:spPr>
+        <p:txBody>
+          <a:bodyPr wrap="square">
+            <a:spAutoFit/>
+          </a:bodyPr>
+          <a:lstStyle/>
+          <a:p>
+            <a:pPr algn="ctr"/>
+            <a:r>
+              <a:rPr sz="1000" b="1" i="0">
+                <a:solidFill>
+                  <a:srgbClr val="F59E0B"/>
+                </a:solidFill>
+              </a:rPr>
+              <a:t>FUND</a:t>
+            </a:r>
+          </a:p>
+        </p:txBody>
+      </p:sp>
+      <p:sp>
+        <p:nvSpPr>
+          <p:cNvPr id="28" name="TextBox 27"/>
+          <p:cNvSpPr txBox="1"/>
+          <p:nvPr/>
+        </p:nvSpPr>
+        <p:spPr>
+          <a:xfrm>
+            <a:off x="9107424" y="2468880"/>
+            <a:ext cx="2743200" cy="457200"/>
+          </a:xfrm>
+          <a:prstGeom prst="rect">
+            <a:avLst/>
+          </a:prstGeom>
+          <a:noFill/>
+        </p:spPr>
+        <p:txBody>
+          <a:bodyPr wrap="square">
+            <a:spAutoFit/>
+          </a:bodyPr>
+          <a:lstStyle/>
+          <a:p>
+            <a:pPr algn="ctr"/>
+            <a:r>
+              <a:rPr sz="1300" b="1" i="0">
+                <a:solidFill>
+                  <a:srgbClr val="FFFFFF"/>
+                </a:solidFill>
+              </a:rPr>
+              <a:t>Parametric Insurance Score</a:t>
+            </a:r>
+          </a:p>
+        </p:txBody>
+      </p:sp>
+      <p:sp>
+        <p:nvSpPr>
+          <p:cNvPr id="29" name="TextBox 28"/>
+          <p:cNvSpPr txBox="1"/>
+          <p:nvPr/>
+        </p:nvSpPr>
+        <p:spPr>
+          <a:xfrm>
+            <a:off x="9198864" y="2971800"/>
+            <a:ext cx="2560320" cy="1371600"/>
+          </a:xfrm>
+          <a:prstGeom prst="rect">
+            <a:avLst/>
+          </a:prstGeom>
+          <a:noFill/>
+        </p:spPr>
+        <p:txBody>
+          <a:bodyPr wrap="square">
+            <a:spAutoFit/>
+          </a:bodyPr>
+          <a:lstStyle/>
+          <a:p>
+            <a:pPr algn="ctr"/>
+            <a:r>
+              <a:rPr sz="1100" b="0" i="0">
+                <a:solidFill>
+                  <a:srgbClr val="B0BEC5"/>
+                </a:solidFill>
+              </a:rPr>
+              <a:t>Pre-landfall severity index triggers instant
+liquidity payouts before the storm hits.</a:t>
             </a:r>
           </a:p>
         </p:txBody>
@@ -3300,6 +5038,14 @@
 <file path=ppt/slides/slide4.xml><?xml version="1.0" encoding="utf-8"?>
 <p:sld xmlns:a="http://schemas.openxmlformats.org/drawingml/2006/main" xmlns:p="http://schemas.openxmlformats.org/presentationml/2006/main" xmlns:r="http://schemas.openxmlformats.org/officeDocument/2006/relationships">
   <p:cSld>
+    <p:bg>
+      <p:bgPr>
+        <a:solidFill>
+          <a:srgbClr val="0F172A"/>
+        </a:solidFill>
+        <a:effectLst/>
+      </p:bgPr>
+    </p:bg>
     <p:spTree>
       <p:nvGrpSpPr>
         <p:cNvPr id="1" name=""/>
@@ -3309,57 +5055,923 @@
       <p:grpSpPr/>
       <p:sp>
         <p:nvSpPr>
-          <p:cNvPr id="2" name="Title 1"/>
-          <p:cNvSpPr>
-            <a:spLocks noGrp="1"/>
-          </p:cNvSpPr>
-          <p:nvPr>
-            <p:ph type="title"/>
-          </p:nvPr>
-        </p:nvSpPr>
-        <p:spPr/>
-        <p:txBody>
-          <a:bodyPr/>
-          <a:lstStyle/>
-          <a:p>
-            <a:r>
-              <a:t>The Gemini Advantage</a:t>
-            </a:r>
-          </a:p>
-        </p:txBody>
-      </p:sp>
-      <p:sp>
-        <p:nvSpPr>
-          <p:cNvPr id="3" name="Content Placeholder 2"/>
-          <p:cNvSpPr>
-            <a:spLocks noGrp="1"/>
-          </p:cNvSpPr>
-          <p:nvPr>
-            <p:ph idx="1"/>
-          </p:nvPr>
-        </p:nvSpPr>
-        <p:spPr/>
-        <p:txBody>
-          <a:bodyPr/>
-          <a:lstStyle/>
-          <a:p>
-            <a:r>
-              <a:t>• The Brain: We use Gemini 1.5 Flash as a Virtual Disaster Commander.</a:t>
-            </a:r>
-          </a:p>
-          <a:p>
-            <a:r>
-              <a:t>• Targeted Actions: Outputs tactical commands instantly.</a:t>
-            </a:r>
-          </a:p>
-          <a:p>
-            <a:r>
-              <a:t>• Inclusive Alerts: Multi-lingual citizen alerts in Bengali, Odia, Hindi, English.</a:t>
-            </a:r>
-          </a:p>
-          <a:p>
-            <a:r>
-              <a:t>• Edge-Case Handling: System scales response proportionally to actual threat telemetry.</a:t>
+          <p:cNvPr id="2" name="Rectangle 1"/>
+          <p:cNvSpPr/>
+          <p:nvPr/>
+        </p:nvSpPr>
+        <p:spPr>
+          <a:xfrm>
+            <a:off x="0" y="0"/>
+            <a:ext cx="12188952" cy="73152"/>
+          </a:xfrm>
+          <a:prstGeom prst="rect">
+            <a:avLst/>
+          </a:prstGeom>
+          <a:solidFill>
+            <a:srgbClr val="10B981"/>
+          </a:solidFill>
+          <a:ln>
+            <a:noFill/>
+          </a:ln>
+        </p:spPr>
+        <p:style>
+          <a:lnRef idx="1">
+            <a:schemeClr val="accent1"/>
+          </a:lnRef>
+          <a:fillRef idx="3">
+            <a:schemeClr val="accent1"/>
+          </a:fillRef>
+          <a:effectRef idx="2">
+            <a:schemeClr val="accent1"/>
+          </a:effectRef>
+          <a:fontRef idx="minor">
+            <a:schemeClr val="lt1"/>
+          </a:fontRef>
+        </p:style>
+        <p:txBody>
+          <a:bodyPr rtlCol="0" anchor="ctr"/>
+          <a:lstStyle/>
+          <a:p>
+            <a:pPr algn="ctr"/>
+          </a:p>
+        </p:txBody>
+      </p:sp>
+      <p:sp>
+        <p:nvSpPr>
+          <p:cNvPr id="3" name="Rectangle 2"/>
+          <p:cNvSpPr/>
+          <p:nvPr/>
+        </p:nvSpPr>
+        <p:spPr>
+          <a:xfrm>
+            <a:off x="0" y="914400"/>
+            <a:ext cx="54864" cy="5943600"/>
+          </a:xfrm>
+          <a:prstGeom prst="rect">
+            <a:avLst/>
+          </a:prstGeom>
+          <a:solidFill>
+            <a:srgbClr val="10B981"/>
+          </a:solidFill>
+          <a:ln>
+            <a:noFill/>
+          </a:ln>
+        </p:spPr>
+        <p:style>
+          <a:lnRef idx="1">
+            <a:schemeClr val="accent1"/>
+          </a:lnRef>
+          <a:fillRef idx="3">
+            <a:schemeClr val="accent1"/>
+          </a:fillRef>
+          <a:effectRef idx="2">
+            <a:schemeClr val="accent1"/>
+          </a:effectRef>
+          <a:fontRef idx="minor">
+            <a:schemeClr val="lt1"/>
+          </a:fontRef>
+        </p:style>
+        <p:txBody>
+          <a:bodyPr rtlCol="0" anchor="ctr"/>
+          <a:lstStyle/>
+          <a:p>
+            <a:pPr algn="ctr"/>
+          </a:p>
+        </p:txBody>
+      </p:sp>
+      <p:sp>
+        <p:nvSpPr>
+          <p:cNvPr id="4" name="TextBox 3"/>
+          <p:cNvSpPr txBox="1"/>
+          <p:nvPr/>
+        </p:nvSpPr>
+        <p:spPr>
+          <a:xfrm>
+            <a:off x="274320" y="137160"/>
+            <a:ext cx="10058400" cy="640080"/>
+          </a:xfrm>
+          <a:prstGeom prst="rect">
+            <a:avLst/>
+          </a:prstGeom>
+          <a:noFill/>
+        </p:spPr>
+        <p:txBody>
+          <a:bodyPr wrap="square">
+            <a:spAutoFit/>
+          </a:bodyPr>
+          <a:lstStyle/>
+          <a:p>
+            <a:pPr algn="l"/>
+            <a:r>
+              <a:rPr sz="3000" b="1" i="0">
+                <a:solidFill>
+                  <a:srgbClr val="10B981"/>
+                </a:solidFill>
+              </a:rPr>
+              <a:t>🧠 The Gemini AI Advantage</a:t>
+            </a:r>
+          </a:p>
+        </p:txBody>
+      </p:sp>
+      <p:sp>
+        <p:nvSpPr>
+          <p:cNvPr id="5" name="TextBox 4"/>
+          <p:cNvSpPr txBox="1"/>
+          <p:nvPr/>
+        </p:nvSpPr>
+        <p:spPr>
+          <a:xfrm>
+            <a:off x="274320" y="731520"/>
+            <a:ext cx="10972800" cy="365760"/>
+          </a:xfrm>
+          <a:prstGeom prst="rect">
+            <a:avLst/>
+          </a:prstGeom>
+          <a:noFill/>
+        </p:spPr>
+        <p:txBody>
+          <a:bodyPr wrap="square">
+            <a:spAutoFit/>
+          </a:bodyPr>
+          <a:lstStyle/>
+          <a:p>
+            <a:pPr algn="l"/>
+            <a:r>
+              <a:rPr sz="1400" b="0" i="1">
+                <a:solidFill>
+                  <a:srgbClr val="B0BEC5"/>
+                </a:solidFill>
+              </a:rPr>
+              <a:t>Gemini 1.5 Flash acts as a Virtual Disaster Commander</a:t>
+            </a:r>
+          </a:p>
+        </p:txBody>
+      </p:sp>
+      <p:sp>
+        <p:nvSpPr>
+          <p:cNvPr id="6" name="Rectangle 5"/>
+          <p:cNvSpPr/>
+          <p:nvPr/>
+        </p:nvSpPr>
+        <p:spPr>
+          <a:xfrm>
+            <a:off x="274320" y="1188720"/>
+            <a:ext cx="5486400" cy="5394960"/>
+          </a:xfrm>
+          <a:prstGeom prst="rect">
+            <a:avLst/>
+          </a:prstGeom>
+          <a:solidFill>
+            <a:srgbClr val="1E293B"/>
+          </a:solidFill>
+          <a:ln>
+            <a:noFill/>
+          </a:ln>
+        </p:spPr>
+        <p:style>
+          <a:lnRef idx="1">
+            <a:schemeClr val="accent1"/>
+          </a:lnRef>
+          <a:fillRef idx="3">
+            <a:schemeClr val="accent1"/>
+          </a:fillRef>
+          <a:effectRef idx="2">
+            <a:schemeClr val="accent1"/>
+          </a:effectRef>
+          <a:fontRef idx="minor">
+            <a:schemeClr val="lt1"/>
+          </a:fontRef>
+        </p:style>
+        <p:txBody>
+          <a:bodyPr rtlCol="0" anchor="ctr"/>
+          <a:lstStyle/>
+          <a:p>
+            <a:pPr algn="ctr"/>
+          </a:p>
+        </p:txBody>
+      </p:sp>
+      <p:sp>
+        <p:nvSpPr>
+          <p:cNvPr id="7" name="TextBox 6"/>
+          <p:cNvSpPr txBox="1"/>
+          <p:nvPr/>
+        </p:nvSpPr>
+        <p:spPr>
+          <a:xfrm>
+            <a:off x="457200" y="1280160"/>
+            <a:ext cx="5120640" cy="411480"/>
+          </a:xfrm>
+          <a:prstGeom prst="rect">
+            <a:avLst/>
+          </a:prstGeom>
+          <a:noFill/>
+        </p:spPr>
+        <p:txBody>
+          <a:bodyPr wrap="square">
+            <a:spAutoFit/>
+          </a:bodyPr>
+          <a:lstStyle/>
+          <a:p>
+            <a:pPr algn="l"/>
+            <a:r>
+              <a:rPr sz="1500" b="1" i="0">
+                <a:solidFill>
+                  <a:srgbClr val="10B981"/>
+                </a:solidFill>
+              </a:rPr>
+              <a:t>What Gemini Produces:</a:t>
+            </a:r>
+          </a:p>
+        </p:txBody>
+      </p:sp>
+      <p:sp>
+        <p:nvSpPr>
+          <p:cNvPr id="8" name="TextBox 7"/>
+          <p:cNvSpPr txBox="1"/>
+          <p:nvPr/>
+        </p:nvSpPr>
+        <p:spPr>
+          <a:xfrm>
+            <a:off x="457200" y="1783080"/>
+            <a:ext cx="5120640" cy="731520"/>
+          </a:xfrm>
+          <a:prstGeom prst="rect">
+            <a:avLst/>
+          </a:prstGeom>
+          <a:noFill/>
+        </p:spPr>
+        <p:txBody>
+          <a:bodyPr wrap="square">
+            <a:spAutoFit/>
+          </a:bodyPr>
+          <a:lstStyle/>
+          <a:p>
+            <a:pPr algn="l"/>
+            <a:r>
+              <a:rPr sz="1200" b="0" i="0">
+                <a:solidFill>
+                  <a:srgbClr val="FFFFFF"/>
+                </a:solidFill>
+              </a:rPr>
+              <a:t>🎯  Structured executive risk reports</a:t>
+            </a:r>
+          </a:p>
+        </p:txBody>
+      </p:sp>
+      <p:sp>
+        <p:nvSpPr>
+          <p:cNvPr id="9" name="TextBox 8"/>
+          <p:cNvSpPr txBox="1"/>
+          <p:nvPr/>
+        </p:nvSpPr>
+        <p:spPr>
+          <a:xfrm>
+            <a:off x="457200" y="2606040"/>
+            <a:ext cx="5120640" cy="731520"/>
+          </a:xfrm>
+          <a:prstGeom prst="rect">
+            <a:avLst/>
+          </a:prstGeom>
+          <a:noFill/>
+        </p:spPr>
+        <p:txBody>
+          <a:bodyPr wrap="square">
+            <a:spAutoFit/>
+          </a:bodyPr>
+          <a:lstStyle/>
+          <a:p>
+            <a:pPr algn="l"/>
+            <a:r>
+              <a:rPr sz="1200" b="0" i="0">
+                <a:solidFill>
+                  <a:srgbClr val="FFFFFF"/>
+                </a:solidFill>
+              </a:rPr>
+              <a:t>🚨  Priority evacuation zone commands</a:t>
+            </a:r>
+          </a:p>
+        </p:txBody>
+      </p:sp>
+      <p:sp>
+        <p:nvSpPr>
+          <p:cNvPr id="10" name="TextBox 9"/>
+          <p:cNvSpPr txBox="1"/>
+          <p:nvPr/>
+        </p:nvSpPr>
+        <p:spPr>
+          <a:xfrm>
+            <a:off x="457200" y="3429000"/>
+            <a:ext cx="5120640" cy="731520"/>
+          </a:xfrm>
+          <a:prstGeom prst="rect">
+            <a:avLst/>
+          </a:prstGeom>
+          <a:noFill/>
+        </p:spPr>
+        <p:txBody>
+          <a:bodyPr wrap="square">
+            <a:spAutoFit/>
+          </a:bodyPr>
+          <a:lstStyle/>
+          <a:p>
+            <a:pPr algn="l"/>
+            <a:r>
+              <a:rPr sz="1200" b="0" i="0">
+                <a:solidFill>
+                  <a:srgbClr val="FFFFFF"/>
+                </a:solidFill>
+              </a:rPr>
+              <a:t>⚡  Infrastructure isolation assessments</a:t>
+            </a:r>
+          </a:p>
+        </p:txBody>
+      </p:sp>
+      <p:sp>
+        <p:nvSpPr>
+          <p:cNvPr id="11" name="TextBox 10"/>
+          <p:cNvSpPr txBox="1"/>
+          <p:nvPr/>
+        </p:nvSpPr>
+        <p:spPr>
+          <a:xfrm>
+            <a:off x="457200" y="4251960"/>
+            <a:ext cx="5120640" cy="731520"/>
+          </a:xfrm>
+          <a:prstGeom prst="rect">
+            <a:avLst/>
+          </a:prstGeom>
+          <a:noFill/>
+        </p:spPr>
+        <p:txBody>
+          <a:bodyPr wrap="square">
+            <a:spAutoFit/>
+          </a:bodyPr>
+          <a:lstStyle/>
+          <a:p>
+            <a:pPr algn="l"/>
+            <a:r>
+              <a:rPr sz="1200" b="0" i="0">
+                <a:solidFill>
+                  <a:srgbClr val="FFFFFF"/>
+                </a:solidFill>
+              </a:rPr>
+              <a:t>📱  Multi-lingual citizen SMS dispatches
+      (Bengali · Odia · Hindi · English)</a:t>
+            </a:r>
+          </a:p>
+        </p:txBody>
+      </p:sp>
+      <p:sp>
+        <p:nvSpPr>
+          <p:cNvPr id="12" name="TextBox 11"/>
+          <p:cNvSpPr txBox="1"/>
+          <p:nvPr/>
+        </p:nvSpPr>
+        <p:spPr>
+          <a:xfrm>
+            <a:off x="457200" y="5074920"/>
+            <a:ext cx="5120640" cy="731520"/>
+          </a:xfrm>
+          <a:prstGeom prst="rect">
+            <a:avLst/>
+          </a:prstGeom>
+          <a:noFill/>
+        </p:spPr>
+        <p:txBody>
+          <a:bodyPr wrap="square">
+            <a:spAutoFit/>
+          </a:bodyPr>
+          <a:lstStyle/>
+          <a:p>
+            <a:pPr algn="l"/>
+            <a:r>
+              <a:rPr sz="1200" b="0" i="0">
+                <a:solidFill>
+                  <a:srgbClr val="FFFFFF"/>
+                </a:solidFill>
+              </a:rPr>
+              <a:t>💳  Parametric insurance severity index</a:t>
+            </a:r>
+          </a:p>
+        </p:txBody>
+      </p:sp>
+      <p:sp>
+        <p:nvSpPr>
+          <p:cNvPr id="13" name="Rectangle 12"/>
+          <p:cNvSpPr/>
+          <p:nvPr/>
+        </p:nvSpPr>
+        <p:spPr>
+          <a:xfrm>
+            <a:off x="6035040" y="1188720"/>
+            <a:ext cx="5852160" cy="5394960"/>
+          </a:xfrm>
+          <a:prstGeom prst="rect">
+            <a:avLst/>
+          </a:prstGeom>
+          <a:solidFill>
+            <a:srgbClr val="1E293B"/>
+          </a:solidFill>
+          <a:ln>
+            <a:noFill/>
+          </a:ln>
+        </p:spPr>
+        <p:style>
+          <a:lnRef idx="1">
+            <a:schemeClr val="accent1"/>
+          </a:lnRef>
+          <a:fillRef idx="3">
+            <a:schemeClr val="accent1"/>
+          </a:fillRef>
+          <a:effectRef idx="2">
+            <a:schemeClr val="accent1"/>
+          </a:effectRef>
+          <a:fontRef idx="minor">
+            <a:schemeClr val="lt1"/>
+          </a:fontRef>
+        </p:style>
+        <p:txBody>
+          <a:bodyPr rtlCol="0" anchor="ctr"/>
+          <a:lstStyle/>
+          <a:p>
+            <a:pPr algn="ctr"/>
+          </a:p>
+        </p:txBody>
+      </p:sp>
+      <p:sp>
+        <p:nvSpPr>
+          <p:cNvPr id="14" name="TextBox 13"/>
+          <p:cNvSpPr txBox="1"/>
+          <p:nvPr/>
+        </p:nvSpPr>
+        <p:spPr>
+          <a:xfrm>
+            <a:off x="6217920" y="1280160"/>
+            <a:ext cx="5486400" cy="411480"/>
+          </a:xfrm>
+          <a:prstGeom prst="rect">
+            <a:avLst/>
+          </a:prstGeom>
+          <a:noFill/>
+        </p:spPr>
+        <p:txBody>
+          <a:bodyPr wrap="square">
+            <a:spAutoFit/>
+          </a:bodyPr>
+          <a:lstStyle/>
+          <a:p>
+            <a:pPr algn="l"/>
+            <a:r>
+              <a:rPr sz="1500" b="1" i="0">
+                <a:solidFill>
+                  <a:srgbClr val="F59E0B"/>
+                </a:solidFill>
+              </a:rPr>
+              <a:t>Edge-Case Handling (Refined Prompts):</a:t>
+            </a:r>
+          </a:p>
+        </p:txBody>
+      </p:sp>
+      <p:sp>
+        <p:nvSpPr>
+          <p:cNvPr id="15" name="Rectangle 14"/>
+          <p:cNvSpPr/>
+          <p:nvPr/>
+        </p:nvSpPr>
+        <p:spPr>
+          <a:xfrm>
+            <a:off x="6217920" y="1828800"/>
+            <a:ext cx="5394960" cy="914400"/>
+          </a:xfrm>
+          <a:prstGeom prst="rect">
+            <a:avLst/>
+          </a:prstGeom>
+          <a:solidFill>
+            <a:srgbClr val="0F2A1F"/>
+          </a:solidFill>
+          <a:ln>
+            <a:noFill/>
+          </a:ln>
+        </p:spPr>
+        <p:style>
+          <a:lnRef idx="1">
+            <a:schemeClr val="accent1"/>
+          </a:lnRef>
+          <a:fillRef idx="3">
+            <a:schemeClr val="accent1"/>
+          </a:fillRef>
+          <a:effectRef idx="2">
+            <a:schemeClr val="accent1"/>
+          </a:effectRef>
+          <a:fontRef idx="minor">
+            <a:schemeClr val="lt1"/>
+          </a:fontRef>
+        </p:style>
+        <p:txBody>
+          <a:bodyPr rtlCol="0" anchor="ctr"/>
+          <a:lstStyle/>
+          <a:p>
+            <a:pPr algn="ctr"/>
+          </a:p>
+        </p:txBody>
+      </p:sp>
+      <p:sp>
+        <p:nvSpPr>
+          <p:cNvPr id="16" name="TextBox 15"/>
+          <p:cNvSpPr txBox="1"/>
+          <p:nvPr/>
+        </p:nvSpPr>
+        <p:spPr>
+          <a:xfrm>
+            <a:off x="6400800" y="1874519"/>
+            <a:ext cx="5029200" cy="320040"/>
+          </a:xfrm>
+          <a:prstGeom prst="rect">
+            <a:avLst/>
+          </a:prstGeom>
+          <a:noFill/>
+        </p:spPr>
+        <p:txBody>
+          <a:bodyPr wrap="square">
+            <a:spAutoFit/>
+          </a:bodyPr>
+          <a:lstStyle/>
+          <a:p>
+            <a:pPr algn="l"/>
+            <a:r>
+              <a:rPr sz="1200" b="1" i="0">
+                <a:solidFill>
+                  <a:srgbClr val="10B981"/>
+                </a:solidFill>
+              </a:rPr>
+              <a:t>⚡ Minor Storm (&lt;119 km/h)</a:t>
+            </a:r>
+          </a:p>
+        </p:txBody>
+      </p:sp>
+      <p:sp>
+        <p:nvSpPr>
+          <p:cNvPr id="17" name="TextBox 16"/>
+          <p:cNvSpPr txBox="1"/>
+          <p:nvPr/>
+        </p:nvSpPr>
+        <p:spPr>
+          <a:xfrm>
+            <a:off x="6400800" y="2194560"/>
+            <a:ext cx="5029200" cy="457200"/>
+          </a:xfrm>
+          <a:prstGeom prst="rect">
+            <a:avLst/>
+          </a:prstGeom>
+          <a:noFill/>
+        </p:spPr>
+        <p:txBody>
+          <a:bodyPr wrap="square">
+            <a:spAutoFit/>
+          </a:bodyPr>
+          <a:lstStyle/>
+          <a:p>
+            <a:pPr algn="l"/>
+            <a:r>
+              <a:rPr sz="1100" b="0" i="0">
+                <a:solidFill>
+                  <a:srgbClr val="B0BEC5"/>
+                </a:solidFill>
+              </a:rPr>
+              <a:t>Downgrades to MODERATE/LOW threat. Focuses on preparedness, not panic.</a:t>
+            </a:r>
+          </a:p>
+        </p:txBody>
+      </p:sp>
+      <p:sp>
+        <p:nvSpPr>
+          <p:cNvPr id="18" name="Rectangle 17"/>
+          <p:cNvSpPr/>
+          <p:nvPr/>
+        </p:nvSpPr>
+        <p:spPr>
+          <a:xfrm>
+            <a:off x="6217920" y="2926080"/>
+            <a:ext cx="5394960" cy="914400"/>
+          </a:xfrm>
+          <a:prstGeom prst="rect">
+            <a:avLst/>
+          </a:prstGeom>
+          <a:solidFill>
+            <a:srgbClr val="0F2A1F"/>
+          </a:solidFill>
+          <a:ln>
+            <a:noFill/>
+          </a:ln>
+        </p:spPr>
+        <p:style>
+          <a:lnRef idx="1">
+            <a:schemeClr val="accent1"/>
+          </a:lnRef>
+          <a:fillRef idx="3">
+            <a:schemeClr val="accent1"/>
+          </a:fillRef>
+          <a:effectRef idx="2">
+            <a:schemeClr val="accent1"/>
+          </a:effectRef>
+          <a:fontRef idx="minor">
+            <a:schemeClr val="lt1"/>
+          </a:fontRef>
+        </p:style>
+        <p:txBody>
+          <a:bodyPr rtlCol="0" anchor="ctr"/>
+          <a:lstStyle/>
+          <a:p>
+            <a:pPr algn="ctr"/>
+          </a:p>
+        </p:txBody>
+      </p:sp>
+      <p:sp>
+        <p:nvSpPr>
+          <p:cNvPr id="19" name="TextBox 18"/>
+          <p:cNvSpPr txBox="1"/>
+          <p:nvPr/>
+        </p:nvSpPr>
+        <p:spPr>
+          <a:xfrm>
+            <a:off x="6400800" y="2971800"/>
+            <a:ext cx="5029200" cy="320040"/>
+          </a:xfrm>
+          <a:prstGeom prst="rect">
+            <a:avLst/>
+          </a:prstGeom>
+          <a:noFill/>
+        </p:spPr>
+        <p:txBody>
+          <a:bodyPr wrap="square">
+            <a:spAutoFit/>
+          </a:bodyPr>
+          <a:lstStyle/>
+          <a:p>
+            <a:pPr algn="l"/>
+            <a:r>
+              <a:rPr sz="1200" b="1" i="0">
+                <a:solidFill>
+                  <a:srgbClr val="10B981"/>
+                </a:solidFill>
+              </a:rPr>
+              <a:t>⚡ Zero Infrastructure Risk</a:t>
+            </a:r>
+          </a:p>
+        </p:txBody>
+      </p:sp>
+      <p:sp>
+        <p:nvSpPr>
+          <p:cNvPr id="20" name="TextBox 19"/>
+          <p:cNvSpPr txBox="1"/>
+          <p:nvPr/>
+        </p:nvSpPr>
+        <p:spPr>
+          <a:xfrm>
+            <a:off x="6400800" y="3291840"/>
+            <a:ext cx="5029200" cy="457200"/>
+          </a:xfrm>
+          <a:prstGeom prst="rect">
+            <a:avLst/>
+          </a:prstGeom>
+          <a:noFill/>
+        </p:spPr>
+        <p:txBody>
+          <a:bodyPr wrap="square">
+            <a:spAutoFit/>
+          </a:bodyPr>
+          <a:lstStyle/>
+          <a:p>
+            <a:pPr algn="l"/>
+            <a:r>
+              <a:rPr sz="1100" b="0" i="0">
+                <a:solidFill>
+                  <a:srgbClr val="B0BEC5"/>
+                </a:solidFill>
+              </a:rPr>
+              <a:t>Explicitly confirms critical infrastructure is secure and operational.</a:t>
+            </a:r>
+          </a:p>
+        </p:txBody>
+      </p:sp>
+      <p:sp>
+        <p:nvSpPr>
+          <p:cNvPr id="21" name="Rectangle 20"/>
+          <p:cNvSpPr/>
+          <p:nvPr/>
+        </p:nvSpPr>
+        <p:spPr>
+          <a:xfrm>
+            <a:off x="6217920" y="4023360"/>
+            <a:ext cx="5394960" cy="914400"/>
+          </a:xfrm>
+          <a:prstGeom prst="rect">
+            <a:avLst/>
+          </a:prstGeom>
+          <a:solidFill>
+            <a:srgbClr val="0F2A1F"/>
+          </a:solidFill>
+          <a:ln>
+            <a:noFill/>
+          </a:ln>
+        </p:spPr>
+        <p:style>
+          <a:lnRef idx="1">
+            <a:schemeClr val="accent1"/>
+          </a:lnRef>
+          <a:fillRef idx="3">
+            <a:schemeClr val="accent1"/>
+          </a:fillRef>
+          <a:effectRef idx="2">
+            <a:schemeClr val="accent1"/>
+          </a:effectRef>
+          <a:fontRef idx="minor">
+            <a:schemeClr val="lt1"/>
+          </a:fontRef>
+        </p:style>
+        <p:txBody>
+          <a:bodyPr rtlCol="0" anchor="ctr"/>
+          <a:lstStyle/>
+          <a:p>
+            <a:pPr algn="ctr"/>
+          </a:p>
+        </p:txBody>
+      </p:sp>
+      <p:sp>
+        <p:nvSpPr>
+          <p:cNvPr id="22" name="TextBox 21"/>
+          <p:cNvSpPr txBox="1"/>
+          <p:nvPr/>
+        </p:nvSpPr>
+        <p:spPr>
+          <a:xfrm>
+            <a:off x="6400800" y="4069080"/>
+            <a:ext cx="5029200" cy="320040"/>
+          </a:xfrm>
+          <a:prstGeom prst="rect">
+            <a:avLst/>
+          </a:prstGeom>
+          <a:noFill/>
+        </p:spPr>
+        <p:txBody>
+          <a:bodyPr wrap="square">
+            <a:spAutoFit/>
+          </a:bodyPr>
+          <a:lstStyle/>
+          <a:p>
+            <a:pPr algn="l"/>
+            <a:r>
+              <a:rPr sz="1200" b="1" i="0">
+                <a:solidFill>
+                  <a:srgbClr val="10B981"/>
+                </a:solidFill>
+              </a:rPr>
+              <a:t>⚡ Below Catastrophe Threshold</a:t>
+            </a:r>
+          </a:p>
+        </p:txBody>
+      </p:sp>
+      <p:sp>
+        <p:nvSpPr>
+          <p:cNvPr id="23" name="TextBox 22"/>
+          <p:cNvSpPr txBox="1"/>
+          <p:nvPr/>
+        </p:nvSpPr>
+        <p:spPr>
+          <a:xfrm>
+            <a:off x="6400800" y="4389120"/>
+            <a:ext cx="5029200" cy="457200"/>
+          </a:xfrm>
+          <a:prstGeom prst="rect">
+            <a:avLst/>
+          </a:prstGeom>
+          <a:noFill/>
+        </p:spPr>
+        <p:txBody>
+          <a:bodyPr wrap="square">
+            <a:spAutoFit/>
+          </a:bodyPr>
+          <a:lstStyle/>
+          <a:p>
+            <a:pPr algn="l"/>
+            <a:r>
+              <a:rPr sz="1100" b="0" i="0">
+                <a:solidFill>
+                  <a:srgbClr val="B0BEC5"/>
+                </a:solidFill>
+              </a:rPr>
+              <a:t>Sets parametric payout to NOT MET with $0, no false triggers.</a:t>
+            </a:r>
+          </a:p>
+        </p:txBody>
+      </p:sp>
+      <p:sp>
+        <p:nvSpPr>
+          <p:cNvPr id="24" name="Rectangle 23"/>
+          <p:cNvSpPr/>
+          <p:nvPr/>
+        </p:nvSpPr>
+        <p:spPr>
+          <a:xfrm>
+            <a:off x="6217920" y="5120640"/>
+            <a:ext cx="5394960" cy="914400"/>
+          </a:xfrm>
+          <a:prstGeom prst="rect">
+            <a:avLst/>
+          </a:prstGeom>
+          <a:solidFill>
+            <a:srgbClr val="0F2A1F"/>
+          </a:solidFill>
+          <a:ln>
+            <a:noFill/>
+          </a:ln>
+        </p:spPr>
+        <p:style>
+          <a:lnRef idx="1">
+            <a:schemeClr val="accent1"/>
+          </a:lnRef>
+          <a:fillRef idx="3">
+            <a:schemeClr val="accent1"/>
+          </a:fillRef>
+          <a:effectRef idx="2">
+            <a:schemeClr val="accent1"/>
+          </a:effectRef>
+          <a:fontRef idx="minor">
+            <a:schemeClr val="lt1"/>
+          </a:fontRef>
+        </p:style>
+        <p:txBody>
+          <a:bodyPr rtlCol="0" anchor="ctr"/>
+          <a:lstStyle/>
+          <a:p>
+            <a:pPr algn="ctr"/>
+          </a:p>
+        </p:txBody>
+      </p:sp>
+      <p:sp>
+        <p:nvSpPr>
+          <p:cNvPr id="25" name="TextBox 24"/>
+          <p:cNvSpPr txBox="1"/>
+          <p:nvPr/>
+        </p:nvSpPr>
+        <p:spPr>
+          <a:xfrm>
+            <a:off x="6400800" y="5166359"/>
+            <a:ext cx="5029200" cy="320040"/>
+          </a:xfrm>
+          <a:prstGeom prst="rect">
+            <a:avLst/>
+          </a:prstGeom>
+          <a:noFill/>
+        </p:spPr>
+        <p:txBody>
+          <a:bodyPr wrap="square">
+            <a:spAutoFit/>
+          </a:bodyPr>
+          <a:lstStyle/>
+          <a:p>
+            <a:pPr algn="l"/>
+            <a:r>
+              <a:rPr sz="1200" b="1" i="0">
+                <a:solidFill>
+                  <a:srgbClr val="10B981"/>
+                </a:solidFill>
+              </a:rPr>
+              <a:t>⚡ API Key Absent</a:t>
+            </a:r>
+          </a:p>
+        </p:txBody>
+      </p:sp>
+      <p:sp>
+        <p:nvSpPr>
+          <p:cNvPr id="26" name="TextBox 25"/>
+          <p:cNvSpPr txBox="1"/>
+          <p:nvPr/>
+        </p:nvSpPr>
+        <p:spPr>
+          <a:xfrm>
+            <a:off x="6400800" y="5486400"/>
+            <a:ext cx="5029200" cy="457200"/>
+          </a:xfrm>
+          <a:prstGeom prst="rect">
+            <a:avLst/>
+          </a:prstGeom>
+          <a:noFill/>
+        </p:spPr>
+        <p:txBody>
+          <a:bodyPr wrap="square">
+            <a:spAutoFit/>
+          </a:bodyPr>
+          <a:lstStyle/>
+          <a:p>
+            <a:pPr algn="l"/>
+            <a:r>
+              <a:rPr sz="1100" b="0" i="0">
+                <a:solidFill>
+                  <a:srgbClr val="B0BEC5"/>
+                </a:solidFill>
+              </a:rPr>
+              <a:t>Gracefully falls back to a pre-built realistic simulation engine.</a:t>
             </a:r>
           </a:p>
         </p:txBody>
@@ -3375,6 +5987,14 @@
 <file path=ppt/slides/slide5.xml><?xml version="1.0" encoding="utf-8"?>
 <p:sld xmlns:a="http://schemas.openxmlformats.org/drawingml/2006/main" xmlns:p="http://schemas.openxmlformats.org/presentationml/2006/main" xmlns:r="http://schemas.openxmlformats.org/officeDocument/2006/relationships">
   <p:cSld>
+    <p:bg>
+      <p:bgPr>
+        <a:solidFill>
+          <a:srgbClr val="0F172A"/>
+        </a:solidFill>
+        <a:effectLst/>
+      </p:bgPr>
+    </p:bg>
     <p:spTree>
       <p:nvGrpSpPr>
         <p:cNvPr id="1" name=""/>
@@ -3384,57 +6004,3277 @@
       <p:grpSpPr/>
       <p:sp>
         <p:nvSpPr>
-          <p:cNvPr id="2" name="Title 1"/>
-          <p:cNvSpPr>
-            <a:spLocks noGrp="1"/>
-          </p:cNvSpPr>
-          <p:nvPr>
-            <p:ph type="title"/>
-          </p:nvPr>
-        </p:nvSpPr>
-        <p:spPr/>
-        <p:txBody>
-          <a:bodyPr/>
-          <a:lstStyle/>
-          <a:p>
-            <a:r>
-              <a:t>Community Impact</a:t>
-            </a:r>
-          </a:p>
-        </p:txBody>
-      </p:sp>
-      <p:sp>
-        <p:nvSpPr>
-          <p:cNvPr id="3" name="Content Placeholder 2"/>
-          <p:cNvSpPr>
-            <a:spLocks noGrp="1"/>
-          </p:cNvSpPr>
-          <p:nvPr>
-            <p:ph idx="1"/>
-          </p:nvPr>
-        </p:nvSpPr>
-        <p:spPr/>
-        <p:txBody>
-          <a:bodyPr/>
-          <a:lstStyle/>
-          <a:p>
-            <a:r>
-              <a:t>• Saves Lives: Hyper-localized evacuation instead of generic panic.</a:t>
-            </a:r>
-          </a:p>
-          <a:p>
-            <a:r>
-              <a:t>• Protects the Vulnerable: Ensures hospitals are not cut off unexpectedly.</a:t>
-            </a:r>
-          </a:p>
-          <a:p>
-            <a:r>
-              <a:t>• Inclusive Communication: Overcomes language barriers instantly.</a:t>
-            </a:r>
-          </a:p>
-          <a:p>
-            <a:r>
-              <a:t>• Financial Resilience: Parametric insurance triggers immediate payouts before disaster hits.</a:t>
+          <p:cNvPr id="2" name="Rectangle 1"/>
+          <p:cNvSpPr/>
+          <p:nvPr/>
+        </p:nvSpPr>
+        <p:spPr>
+          <a:xfrm>
+            <a:off x="0" y="0"/>
+            <a:ext cx="12188952" cy="73152"/>
+          </a:xfrm>
+          <a:prstGeom prst="rect">
+            <a:avLst/>
+          </a:prstGeom>
+          <a:solidFill>
+            <a:srgbClr val="F59E0B"/>
+          </a:solidFill>
+          <a:ln>
+            <a:noFill/>
+          </a:ln>
+        </p:spPr>
+        <p:style>
+          <a:lnRef idx="1">
+            <a:schemeClr val="accent1"/>
+          </a:lnRef>
+          <a:fillRef idx="3">
+            <a:schemeClr val="accent1"/>
+          </a:fillRef>
+          <a:effectRef idx="2">
+            <a:schemeClr val="accent1"/>
+          </a:effectRef>
+          <a:fontRef idx="minor">
+            <a:schemeClr val="lt1"/>
+          </a:fontRef>
+        </p:style>
+        <p:txBody>
+          <a:bodyPr rtlCol="0" anchor="ctr"/>
+          <a:lstStyle/>
+          <a:p>
+            <a:pPr algn="ctr"/>
+          </a:p>
+        </p:txBody>
+      </p:sp>
+      <p:sp>
+        <p:nvSpPr>
+          <p:cNvPr id="3" name="Rectangle 2"/>
+          <p:cNvSpPr/>
+          <p:nvPr/>
+        </p:nvSpPr>
+        <p:spPr>
+          <a:xfrm>
+            <a:off x="0" y="914400"/>
+            <a:ext cx="54864" cy="5943600"/>
+          </a:xfrm>
+          <a:prstGeom prst="rect">
+            <a:avLst/>
+          </a:prstGeom>
+          <a:solidFill>
+            <a:srgbClr val="F59E0B"/>
+          </a:solidFill>
+          <a:ln>
+            <a:noFill/>
+          </a:ln>
+        </p:spPr>
+        <p:style>
+          <a:lnRef idx="1">
+            <a:schemeClr val="accent1"/>
+          </a:lnRef>
+          <a:fillRef idx="3">
+            <a:schemeClr val="accent1"/>
+          </a:fillRef>
+          <a:effectRef idx="2">
+            <a:schemeClr val="accent1"/>
+          </a:effectRef>
+          <a:fontRef idx="minor">
+            <a:schemeClr val="lt1"/>
+          </a:fontRef>
+        </p:style>
+        <p:txBody>
+          <a:bodyPr rtlCol="0" anchor="ctr"/>
+          <a:lstStyle/>
+          <a:p>
+            <a:pPr algn="ctr"/>
+          </a:p>
+        </p:txBody>
+      </p:sp>
+      <p:sp>
+        <p:nvSpPr>
+          <p:cNvPr id="4" name="TextBox 3"/>
+          <p:cNvSpPr txBox="1"/>
+          <p:nvPr/>
+        </p:nvSpPr>
+        <p:spPr>
+          <a:xfrm>
+            <a:off x="274320" y="137160"/>
+            <a:ext cx="10058400" cy="640080"/>
+          </a:xfrm>
+          <a:prstGeom prst="rect">
+            <a:avLst/>
+          </a:prstGeom>
+          <a:noFill/>
+        </p:spPr>
+        <p:txBody>
+          <a:bodyPr wrap="square">
+            <a:spAutoFit/>
+          </a:bodyPr>
+          <a:lstStyle/>
+          <a:p>
+            <a:pPr algn="l"/>
+            <a:r>
+              <a:rPr sz="3000" b="1" i="0">
+                <a:solidFill>
+                  <a:srgbClr val="F59E0B"/>
+                </a:solidFill>
+              </a:rPr>
+              <a:t>🌍 Community Impact</a:t>
+            </a:r>
+          </a:p>
+        </p:txBody>
+      </p:sp>
+      <p:sp>
+        <p:nvSpPr>
+          <p:cNvPr id="5" name="TextBox 4"/>
+          <p:cNvSpPr txBox="1"/>
+          <p:nvPr/>
+        </p:nvSpPr>
+        <p:spPr>
+          <a:xfrm>
+            <a:off x="274320" y="731520"/>
+            <a:ext cx="10972800" cy="365760"/>
+          </a:xfrm>
+          <a:prstGeom prst="rect">
+            <a:avLst/>
+          </a:prstGeom>
+          <a:noFill/>
+        </p:spPr>
+        <p:txBody>
+          <a:bodyPr wrap="square">
+            <a:spAutoFit/>
+          </a:bodyPr>
+          <a:lstStyle/>
+          <a:p>
+            <a:pPr algn="l"/>
+            <a:r>
+              <a:rPr sz="1400" b="0" i="1">
+                <a:solidFill>
+                  <a:srgbClr val="B0BEC5"/>
+                </a:solidFill>
+              </a:rPr>
+              <a:t>Real-world value for millions of vulnerable coastal residents</a:t>
+            </a:r>
+          </a:p>
+        </p:txBody>
+      </p:sp>
+      <p:sp>
+        <p:nvSpPr>
+          <p:cNvPr id="6" name="Rectangle 5"/>
+          <p:cNvSpPr/>
+          <p:nvPr/>
+        </p:nvSpPr>
+        <p:spPr>
+          <a:xfrm>
+            <a:off x="274320" y="1280160"/>
+            <a:ext cx="5669280" cy="2377440"/>
+          </a:xfrm>
+          <a:prstGeom prst="rect">
+            <a:avLst/>
+          </a:prstGeom>
+          <a:solidFill>
+            <a:srgbClr val="1E293B"/>
+          </a:solidFill>
+          <a:ln>
+            <a:noFill/>
+          </a:ln>
+        </p:spPr>
+        <p:style>
+          <a:lnRef idx="1">
+            <a:schemeClr val="accent1"/>
+          </a:lnRef>
+          <a:fillRef idx="3">
+            <a:schemeClr val="accent1"/>
+          </a:fillRef>
+          <a:effectRef idx="2">
+            <a:schemeClr val="accent1"/>
+          </a:effectRef>
+          <a:fontRef idx="minor">
+            <a:schemeClr val="lt1"/>
+          </a:fontRef>
+        </p:style>
+        <p:txBody>
+          <a:bodyPr rtlCol="0" anchor="ctr"/>
+          <a:lstStyle/>
+          <a:p>
+            <a:pPr algn="ctr"/>
+          </a:p>
+        </p:txBody>
+      </p:sp>
+      <p:sp>
+        <p:nvSpPr>
+          <p:cNvPr id="7" name="Rectangle 6"/>
+          <p:cNvSpPr/>
+          <p:nvPr/>
+        </p:nvSpPr>
+        <p:spPr>
+          <a:xfrm>
+            <a:off x="274320" y="1280160"/>
+            <a:ext cx="5669280" cy="54864"/>
+          </a:xfrm>
+          <a:prstGeom prst="rect">
+            <a:avLst/>
+          </a:prstGeom>
+          <a:solidFill>
+            <a:srgbClr val="10B981"/>
+          </a:solidFill>
+          <a:ln>
+            <a:noFill/>
+          </a:ln>
+        </p:spPr>
+        <p:style>
+          <a:lnRef idx="1">
+            <a:schemeClr val="accent1"/>
+          </a:lnRef>
+          <a:fillRef idx="3">
+            <a:schemeClr val="accent1"/>
+          </a:fillRef>
+          <a:effectRef idx="2">
+            <a:schemeClr val="accent1"/>
+          </a:effectRef>
+          <a:fontRef idx="minor">
+            <a:schemeClr val="lt1"/>
+          </a:fontRef>
+        </p:style>
+        <p:txBody>
+          <a:bodyPr rtlCol="0" anchor="ctr"/>
+          <a:lstStyle/>
+          <a:p>
+            <a:pPr algn="ctr"/>
+          </a:p>
+        </p:txBody>
+      </p:sp>
+      <p:sp>
+        <p:nvSpPr>
+          <p:cNvPr id="8" name="TextBox 7"/>
+          <p:cNvSpPr txBox="1"/>
+          <p:nvPr/>
+        </p:nvSpPr>
+        <p:spPr>
+          <a:xfrm>
+            <a:off x="411479" y="1389888"/>
+            <a:ext cx="5394960" cy="411480"/>
+          </a:xfrm>
+          <a:prstGeom prst="rect">
+            <a:avLst/>
+          </a:prstGeom>
+          <a:noFill/>
+        </p:spPr>
+        <p:txBody>
+          <a:bodyPr wrap="square">
+            <a:spAutoFit/>
+          </a:bodyPr>
+          <a:lstStyle/>
+          <a:p>
+            <a:pPr algn="l"/>
+            <a:r>
+              <a:rPr sz="1500" b="1" i="0">
+                <a:solidFill>
+                  <a:srgbClr val="10B981"/>
+                </a:solidFill>
+              </a:rPr>
+              <a:t>🏃 Saves Lives</a:t>
+            </a:r>
+          </a:p>
+        </p:txBody>
+      </p:sp>
+      <p:sp>
+        <p:nvSpPr>
+          <p:cNvPr id="9" name="TextBox 8"/>
+          <p:cNvSpPr txBox="1"/>
+          <p:nvPr/>
+        </p:nvSpPr>
+        <p:spPr>
+          <a:xfrm>
+            <a:off x="411479" y="1828800"/>
+            <a:ext cx="5394960" cy="1645920"/>
+          </a:xfrm>
+          <a:prstGeom prst="rect">
+            <a:avLst/>
+          </a:prstGeom>
+          <a:noFill/>
+        </p:spPr>
+        <p:txBody>
+          <a:bodyPr wrap="square">
+            <a:spAutoFit/>
+          </a:bodyPr>
+          <a:lstStyle/>
+          <a:p>
+            <a:pPr algn="l"/>
+            <a:r>
+              <a:rPr sz="1100" b="0" i="0">
+                <a:solidFill>
+                  <a:srgbClr val="B0BEC5"/>
+                </a:solidFill>
+              </a:rPr>
+              <a:t>Hyper-localized evacuation orders — not generic warnings. Residents in low-lying fishing hamlets and riverine delta islands get specific, actionable guidance.</a:t>
+            </a:r>
+          </a:p>
+        </p:txBody>
+      </p:sp>
+      <p:sp>
+        <p:nvSpPr>
+          <p:cNvPr id="10" name="Rectangle 9"/>
+          <p:cNvSpPr/>
+          <p:nvPr/>
+        </p:nvSpPr>
+        <p:spPr>
+          <a:xfrm>
+            <a:off x="6217920" y="1280160"/>
+            <a:ext cx="5669280" cy="2377440"/>
+          </a:xfrm>
+          <a:prstGeom prst="rect">
+            <a:avLst/>
+          </a:prstGeom>
+          <a:solidFill>
+            <a:srgbClr val="1E293B"/>
+          </a:solidFill>
+          <a:ln>
+            <a:noFill/>
+          </a:ln>
+        </p:spPr>
+        <p:style>
+          <a:lnRef idx="1">
+            <a:schemeClr val="accent1"/>
+          </a:lnRef>
+          <a:fillRef idx="3">
+            <a:schemeClr val="accent1"/>
+          </a:fillRef>
+          <a:effectRef idx="2">
+            <a:schemeClr val="accent1"/>
+          </a:effectRef>
+          <a:fontRef idx="minor">
+            <a:schemeClr val="lt1"/>
+          </a:fontRef>
+        </p:style>
+        <p:txBody>
+          <a:bodyPr rtlCol="0" anchor="ctr"/>
+          <a:lstStyle/>
+          <a:p>
+            <a:pPr algn="ctr"/>
+          </a:p>
+        </p:txBody>
+      </p:sp>
+      <p:sp>
+        <p:nvSpPr>
+          <p:cNvPr id="11" name="Rectangle 10"/>
+          <p:cNvSpPr/>
+          <p:nvPr/>
+        </p:nvSpPr>
+        <p:spPr>
+          <a:xfrm>
+            <a:off x="6217920" y="1280160"/>
+            <a:ext cx="5669280" cy="54864"/>
+          </a:xfrm>
+          <a:prstGeom prst="rect">
+            <a:avLst/>
+          </a:prstGeom>
+          <a:solidFill>
+            <a:srgbClr val="1E88E5"/>
+          </a:solidFill>
+          <a:ln>
+            <a:noFill/>
+          </a:ln>
+        </p:spPr>
+        <p:style>
+          <a:lnRef idx="1">
+            <a:schemeClr val="accent1"/>
+          </a:lnRef>
+          <a:fillRef idx="3">
+            <a:schemeClr val="accent1"/>
+          </a:fillRef>
+          <a:effectRef idx="2">
+            <a:schemeClr val="accent1"/>
+          </a:effectRef>
+          <a:fontRef idx="minor">
+            <a:schemeClr val="lt1"/>
+          </a:fontRef>
+        </p:style>
+        <p:txBody>
+          <a:bodyPr rtlCol="0" anchor="ctr"/>
+          <a:lstStyle/>
+          <a:p>
+            <a:pPr algn="ctr"/>
+          </a:p>
+        </p:txBody>
+      </p:sp>
+      <p:sp>
+        <p:nvSpPr>
+          <p:cNvPr id="12" name="TextBox 11"/>
+          <p:cNvSpPr txBox="1"/>
+          <p:nvPr/>
+        </p:nvSpPr>
+        <p:spPr>
+          <a:xfrm>
+            <a:off x="6355080" y="1389888"/>
+            <a:ext cx="5394960" cy="411480"/>
+          </a:xfrm>
+          <a:prstGeom prst="rect">
+            <a:avLst/>
+          </a:prstGeom>
+          <a:noFill/>
+        </p:spPr>
+        <p:txBody>
+          <a:bodyPr wrap="square">
+            <a:spAutoFit/>
+          </a:bodyPr>
+          <a:lstStyle/>
+          <a:p>
+            <a:pPr algn="l"/>
+            <a:r>
+              <a:rPr sz="1500" b="1" i="0">
+                <a:solidFill>
+                  <a:srgbClr val="1E88E5"/>
+                </a:solidFill>
+              </a:rPr>
+              <a:t>🏥 Protects Critical Infrastructure</a:t>
+            </a:r>
+          </a:p>
+        </p:txBody>
+      </p:sp>
+      <p:sp>
+        <p:nvSpPr>
+          <p:cNvPr id="13" name="TextBox 12"/>
+          <p:cNvSpPr txBox="1"/>
+          <p:nvPr/>
+        </p:nvSpPr>
+        <p:spPr>
+          <a:xfrm>
+            <a:off x="6355080" y="1828800"/>
+            <a:ext cx="5394960" cy="1645920"/>
+          </a:xfrm>
+          <a:prstGeom prst="rect">
+            <a:avLst/>
+          </a:prstGeom>
+          <a:noFill/>
+        </p:spPr>
+        <p:txBody>
+          <a:bodyPr wrap="square">
+            <a:spAutoFit/>
+          </a:bodyPr>
+          <a:lstStyle/>
+          <a:p>
+            <a:pPr algn="l"/>
+            <a:r>
+              <a:rPr sz="1100" b="0" i="0">
+                <a:solidFill>
+                  <a:srgbClr val="B0BEC5"/>
+                </a:solidFill>
+              </a:rPr>
+              <a:t>Hospitals are never caught off-guard. Pre-landfall alerts ensure backup generators are deployed and amphibious transport is pre-positioned for isolated trauma centers.</a:t>
+            </a:r>
+          </a:p>
+        </p:txBody>
+      </p:sp>
+      <p:sp>
+        <p:nvSpPr>
+          <p:cNvPr id="14" name="Rectangle 13"/>
+          <p:cNvSpPr/>
+          <p:nvPr/>
+        </p:nvSpPr>
+        <p:spPr>
+          <a:xfrm>
+            <a:off x="274320" y="3931920"/>
+            <a:ext cx="5669280" cy="2377440"/>
+          </a:xfrm>
+          <a:prstGeom prst="rect">
+            <a:avLst/>
+          </a:prstGeom>
+          <a:solidFill>
+            <a:srgbClr val="1E293B"/>
+          </a:solidFill>
+          <a:ln>
+            <a:noFill/>
+          </a:ln>
+        </p:spPr>
+        <p:style>
+          <a:lnRef idx="1">
+            <a:schemeClr val="accent1"/>
+          </a:lnRef>
+          <a:fillRef idx="3">
+            <a:schemeClr val="accent1"/>
+          </a:fillRef>
+          <a:effectRef idx="2">
+            <a:schemeClr val="accent1"/>
+          </a:effectRef>
+          <a:fontRef idx="minor">
+            <a:schemeClr val="lt1"/>
+          </a:fontRef>
+        </p:style>
+        <p:txBody>
+          <a:bodyPr rtlCol="0" anchor="ctr"/>
+          <a:lstStyle/>
+          <a:p>
+            <a:pPr algn="ctr"/>
+          </a:p>
+        </p:txBody>
+      </p:sp>
+      <p:sp>
+        <p:nvSpPr>
+          <p:cNvPr id="15" name="Rectangle 14"/>
+          <p:cNvSpPr/>
+          <p:nvPr/>
+        </p:nvSpPr>
+        <p:spPr>
+          <a:xfrm>
+            <a:off x="274320" y="3931920"/>
+            <a:ext cx="5669280" cy="54864"/>
+          </a:xfrm>
+          <a:prstGeom prst="rect">
+            <a:avLst/>
+          </a:prstGeom>
+          <a:solidFill>
+            <a:srgbClr val="38BDF8"/>
+          </a:solidFill>
+          <a:ln>
+            <a:noFill/>
+          </a:ln>
+        </p:spPr>
+        <p:style>
+          <a:lnRef idx="1">
+            <a:schemeClr val="accent1"/>
+          </a:lnRef>
+          <a:fillRef idx="3">
+            <a:schemeClr val="accent1"/>
+          </a:fillRef>
+          <a:effectRef idx="2">
+            <a:schemeClr val="accent1"/>
+          </a:effectRef>
+          <a:fontRef idx="minor">
+            <a:schemeClr val="lt1"/>
+          </a:fontRef>
+        </p:style>
+        <p:txBody>
+          <a:bodyPr rtlCol="0" anchor="ctr"/>
+          <a:lstStyle/>
+          <a:p>
+            <a:pPr algn="ctr"/>
+          </a:p>
+        </p:txBody>
+      </p:sp>
+      <p:sp>
+        <p:nvSpPr>
+          <p:cNvPr id="16" name="TextBox 15"/>
+          <p:cNvSpPr txBox="1"/>
+          <p:nvPr/>
+        </p:nvSpPr>
+        <p:spPr>
+          <a:xfrm>
+            <a:off x="411479" y="4041648"/>
+            <a:ext cx="5394960" cy="411480"/>
+          </a:xfrm>
+          <a:prstGeom prst="rect">
+            <a:avLst/>
+          </a:prstGeom>
+          <a:noFill/>
+        </p:spPr>
+        <p:txBody>
+          <a:bodyPr wrap="square">
+            <a:spAutoFit/>
+          </a:bodyPr>
+          <a:lstStyle/>
+          <a:p>
+            <a:pPr algn="l"/>
+            <a:r>
+              <a:rPr sz="1500" b="1" i="0">
+                <a:solidFill>
+                  <a:srgbClr val="38BDF8"/>
+                </a:solidFill>
+              </a:rPr>
+              <a:t>🗣️ Inclusive Communication</a:t>
+            </a:r>
+          </a:p>
+        </p:txBody>
+      </p:sp>
+      <p:sp>
+        <p:nvSpPr>
+          <p:cNvPr id="17" name="TextBox 16"/>
+          <p:cNvSpPr txBox="1"/>
+          <p:nvPr/>
+        </p:nvSpPr>
+        <p:spPr>
+          <a:xfrm>
+            <a:off x="411479" y="4480559"/>
+            <a:ext cx="5394960" cy="1645920"/>
+          </a:xfrm>
+          <a:prstGeom prst="rect">
+            <a:avLst/>
+          </a:prstGeom>
+          <a:noFill/>
+        </p:spPr>
+        <p:txBody>
+          <a:bodyPr wrap="square">
+            <a:spAutoFit/>
+          </a:bodyPr>
+          <a:lstStyle/>
+          <a:p>
+            <a:pPr algn="l"/>
+            <a:r>
+              <a:rPr sz="1100" b="0" i="0">
+                <a:solidFill>
+                  <a:srgbClr val="B0BEC5"/>
+                </a:solidFill>
+              </a:rPr>
+              <a:t>Overcomes the language barrier by auto-generating native-language alerts in Bengali, Odia, Hindi, and English — reaching the most vulnerable who may not speak English.</a:t>
+            </a:r>
+          </a:p>
+        </p:txBody>
+      </p:sp>
+      <p:sp>
+        <p:nvSpPr>
+          <p:cNvPr id="18" name="Rectangle 17"/>
+          <p:cNvSpPr/>
+          <p:nvPr/>
+        </p:nvSpPr>
+        <p:spPr>
+          <a:xfrm>
+            <a:off x="6217920" y="3931920"/>
+            <a:ext cx="5669280" cy="2377440"/>
+          </a:xfrm>
+          <a:prstGeom prst="rect">
+            <a:avLst/>
+          </a:prstGeom>
+          <a:solidFill>
+            <a:srgbClr val="1E293B"/>
+          </a:solidFill>
+          <a:ln>
+            <a:noFill/>
+          </a:ln>
+        </p:spPr>
+        <p:style>
+          <a:lnRef idx="1">
+            <a:schemeClr val="accent1"/>
+          </a:lnRef>
+          <a:fillRef idx="3">
+            <a:schemeClr val="accent1"/>
+          </a:fillRef>
+          <a:effectRef idx="2">
+            <a:schemeClr val="accent1"/>
+          </a:effectRef>
+          <a:fontRef idx="minor">
+            <a:schemeClr val="lt1"/>
+          </a:fontRef>
+        </p:style>
+        <p:txBody>
+          <a:bodyPr rtlCol="0" anchor="ctr"/>
+          <a:lstStyle/>
+          <a:p>
+            <a:pPr algn="ctr"/>
+          </a:p>
+        </p:txBody>
+      </p:sp>
+      <p:sp>
+        <p:nvSpPr>
+          <p:cNvPr id="19" name="Rectangle 18"/>
+          <p:cNvSpPr/>
+          <p:nvPr/>
+        </p:nvSpPr>
+        <p:spPr>
+          <a:xfrm>
+            <a:off x="6217920" y="3931920"/>
+            <a:ext cx="5669280" cy="54864"/>
+          </a:xfrm>
+          <a:prstGeom prst="rect">
+            <a:avLst/>
+          </a:prstGeom>
+          <a:solidFill>
+            <a:srgbClr val="F59E0B"/>
+          </a:solidFill>
+          <a:ln>
+            <a:noFill/>
+          </a:ln>
+        </p:spPr>
+        <p:style>
+          <a:lnRef idx="1">
+            <a:schemeClr val="accent1"/>
+          </a:lnRef>
+          <a:fillRef idx="3">
+            <a:schemeClr val="accent1"/>
+          </a:fillRef>
+          <a:effectRef idx="2">
+            <a:schemeClr val="accent1"/>
+          </a:effectRef>
+          <a:fontRef idx="minor">
+            <a:schemeClr val="lt1"/>
+          </a:fontRef>
+        </p:style>
+        <p:txBody>
+          <a:bodyPr rtlCol="0" anchor="ctr"/>
+          <a:lstStyle/>
+          <a:p>
+            <a:pPr algn="ctr"/>
+          </a:p>
+        </p:txBody>
+      </p:sp>
+      <p:sp>
+        <p:nvSpPr>
+          <p:cNvPr id="20" name="TextBox 19"/>
+          <p:cNvSpPr txBox="1"/>
+          <p:nvPr/>
+        </p:nvSpPr>
+        <p:spPr>
+          <a:xfrm>
+            <a:off x="6355080" y="4041648"/>
+            <a:ext cx="5394960" cy="411480"/>
+          </a:xfrm>
+          <a:prstGeom prst="rect">
+            <a:avLst/>
+          </a:prstGeom>
+          <a:noFill/>
+        </p:spPr>
+        <p:txBody>
+          <a:bodyPr wrap="square">
+            <a:spAutoFit/>
+          </a:bodyPr>
+          <a:lstStyle/>
+          <a:p>
+            <a:pPr algn="l"/>
+            <a:r>
+              <a:rPr sz="1500" b="1" i="0">
+                <a:solidFill>
+                  <a:srgbClr val="F59E0B"/>
+                </a:solidFill>
+              </a:rPr>
+              <a:t>💰 Financial Resilience</a:t>
+            </a:r>
+          </a:p>
+        </p:txBody>
+      </p:sp>
+      <p:sp>
+        <p:nvSpPr>
+          <p:cNvPr id="21" name="TextBox 20"/>
+          <p:cNvSpPr txBox="1"/>
+          <p:nvPr/>
+        </p:nvSpPr>
+        <p:spPr>
+          <a:xfrm>
+            <a:off x="6355080" y="4480559"/>
+            <a:ext cx="5394960" cy="1645920"/>
+          </a:xfrm>
+          <a:prstGeom prst="rect">
+            <a:avLst/>
+          </a:prstGeom>
+          <a:noFill/>
+        </p:spPr>
+        <p:txBody>
+          <a:bodyPr wrap="square">
+            <a:spAutoFit/>
+          </a:bodyPr>
+          <a:lstStyle/>
+          <a:p>
+            <a:pPr algn="l"/>
+            <a:r>
+              <a:rPr sz="1100" b="0" i="0">
+                <a:solidFill>
+                  <a:srgbClr val="B0BEC5"/>
+                </a:solidFill>
+              </a:rPr>
+              <a:t>Parametric insurance scores trigger immediate liquidity payouts BEFORE the storm hits — allowing communities to buy supplies and fuel relief operations instead of waiting for post-disaster aid.</a:t>
+            </a:r>
+          </a:p>
+        </p:txBody>
+      </p:sp>
+    </p:spTree>
+  </p:cSld>
+  <p:clrMapOvr>
+    <a:masterClrMapping/>
+  </p:clrMapOvr>
+</p:sld>
+</file>
+
+<file path=ppt/slides/slide6.xml><?xml version="1.0" encoding="utf-8"?>
+<p:sld xmlns:a="http://schemas.openxmlformats.org/drawingml/2006/main" xmlns:p="http://schemas.openxmlformats.org/presentationml/2006/main" xmlns:r="http://schemas.openxmlformats.org/officeDocument/2006/relationships">
+  <p:cSld>
+    <p:bg>
+      <p:bgPr>
+        <a:solidFill>
+          <a:srgbClr val="0F172A"/>
+        </a:solidFill>
+        <a:effectLst/>
+      </p:bgPr>
+    </p:bg>
+    <p:spTree>
+      <p:nvGrpSpPr>
+        <p:cNvPr id="1" name=""/>
+        <p:cNvGrpSpPr/>
+        <p:nvPr/>
+      </p:nvGrpSpPr>
+      <p:grpSpPr/>
+      <p:sp>
+        <p:nvSpPr>
+          <p:cNvPr id="2" name="Rectangle 1"/>
+          <p:cNvSpPr/>
+          <p:nvPr/>
+        </p:nvSpPr>
+        <p:spPr>
+          <a:xfrm>
+            <a:off x="0" y="0"/>
+            <a:ext cx="12188952" cy="73152"/>
+          </a:xfrm>
+          <a:prstGeom prst="rect">
+            <a:avLst/>
+          </a:prstGeom>
+          <a:solidFill>
+            <a:srgbClr val="38BDF8"/>
+          </a:solidFill>
+          <a:ln>
+            <a:noFill/>
+          </a:ln>
+        </p:spPr>
+        <p:style>
+          <a:lnRef idx="1">
+            <a:schemeClr val="accent1"/>
+          </a:lnRef>
+          <a:fillRef idx="3">
+            <a:schemeClr val="accent1"/>
+          </a:fillRef>
+          <a:effectRef idx="2">
+            <a:schemeClr val="accent1"/>
+          </a:effectRef>
+          <a:fontRef idx="minor">
+            <a:schemeClr val="lt1"/>
+          </a:fontRef>
+        </p:style>
+        <p:txBody>
+          <a:bodyPr rtlCol="0" anchor="ctr"/>
+          <a:lstStyle/>
+          <a:p>
+            <a:pPr algn="ctr"/>
+          </a:p>
+        </p:txBody>
+      </p:sp>
+      <p:sp>
+        <p:nvSpPr>
+          <p:cNvPr id="3" name="Rectangle 2"/>
+          <p:cNvSpPr/>
+          <p:nvPr/>
+        </p:nvSpPr>
+        <p:spPr>
+          <a:xfrm>
+            <a:off x="0" y="914400"/>
+            <a:ext cx="54864" cy="5943600"/>
+          </a:xfrm>
+          <a:prstGeom prst="rect">
+            <a:avLst/>
+          </a:prstGeom>
+          <a:solidFill>
+            <a:srgbClr val="38BDF8"/>
+          </a:solidFill>
+          <a:ln>
+            <a:noFill/>
+          </a:ln>
+        </p:spPr>
+        <p:style>
+          <a:lnRef idx="1">
+            <a:schemeClr val="accent1"/>
+          </a:lnRef>
+          <a:fillRef idx="3">
+            <a:schemeClr val="accent1"/>
+          </a:fillRef>
+          <a:effectRef idx="2">
+            <a:schemeClr val="accent1"/>
+          </a:effectRef>
+          <a:fontRef idx="minor">
+            <a:schemeClr val="lt1"/>
+          </a:fontRef>
+        </p:style>
+        <p:txBody>
+          <a:bodyPr rtlCol="0" anchor="ctr"/>
+          <a:lstStyle/>
+          <a:p>
+            <a:pPr algn="ctr"/>
+          </a:p>
+        </p:txBody>
+      </p:sp>
+      <p:sp>
+        <p:nvSpPr>
+          <p:cNvPr id="4" name="TextBox 3"/>
+          <p:cNvSpPr txBox="1"/>
+          <p:nvPr/>
+        </p:nvSpPr>
+        <p:spPr>
+          <a:xfrm>
+            <a:off x="274320" y="137160"/>
+            <a:ext cx="10058400" cy="640080"/>
+          </a:xfrm>
+          <a:prstGeom prst="rect">
+            <a:avLst/>
+          </a:prstGeom>
+          <a:noFill/>
+        </p:spPr>
+        <p:txBody>
+          <a:bodyPr wrap="square">
+            <a:spAutoFit/>
+          </a:bodyPr>
+          <a:lstStyle/>
+          <a:p>
+            <a:pPr algn="l"/>
+            <a:r>
+              <a:rPr sz="3000" b="1" i="0">
+                <a:solidFill>
+                  <a:srgbClr val="38BDF8"/>
+                </a:solidFill>
+              </a:rPr>
+              <a:t>⚙️ System Architecture</a:t>
+            </a:r>
+          </a:p>
+        </p:txBody>
+      </p:sp>
+      <p:sp>
+        <p:nvSpPr>
+          <p:cNvPr id="5" name="Rectangle 4"/>
+          <p:cNvSpPr/>
+          <p:nvPr/>
+        </p:nvSpPr>
+        <p:spPr>
+          <a:xfrm>
+            <a:off x="274320" y="1005840"/>
+            <a:ext cx="2011680" cy="1645920"/>
+          </a:xfrm>
+          <a:prstGeom prst="rect">
+            <a:avLst/>
+          </a:prstGeom>
+          <a:solidFill>
+            <a:srgbClr val="1E293B"/>
+          </a:solidFill>
+          <a:ln>
+            <a:solidFill>
+              <a:srgbClr val="38BDF8"/>
+            </a:solidFill>
+          </a:ln>
+        </p:spPr>
+        <p:style>
+          <a:lnRef idx="1">
+            <a:schemeClr val="accent1"/>
+          </a:lnRef>
+          <a:fillRef idx="3">
+            <a:schemeClr val="accent1"/>
+          </a:fillRef>
+          <a:effectRef idx="2">
+            <a:schemeClr val="accent1"/>
+          </a:effectRef>
+          <a:fontRef idx="minor">
+            <a:schemeClr val="lt1"/>
+          </a:fontRef>
+        </p:style>
+        <p:txBody>
+          <a:bodyPr rtlCol="0" anchor="ctr"/>
+          <a:lstStyle/>
+          <a:p>
+            <a:pPr algn="ctr"/>
+          </a:p>
+        </p:txBody>
+      </p:sp>
+      <p:sp>
+        <p:nvSpPr>
+          <p:cNvPr id="6" name="TextBox 5"/>
+          <p:cNvSpPr txBox="1"/>
+          <p:nvPr/>
+        </p:nvSpPr>
+        <p:spPr>
+          <a:xfrm>
+            <a:off x="274320" y="1051560"/>
+            <a:ext cx="2011680" cy="411480"/>
+          </a:xfrm>
+          <a:prstGeom prst="rect">
+            <a:avLst/>
+          </a:prstGeom>
+          <a:noFill/>
+        </p:spPr>
+        <p:txBody>
+          <a:bodyPr wrap="square">
+            <a:spAutoFit/>
+          </a:bodyPr>
+          <a:lstStyle/>
+          <a:p>
+            <a:pPr algn="ctr"/>
+            <a:r>
+              <a:rPr sz="1300" b="1" i="0">
+                <a:solidFill>
+                  <a:srgbClr val="38BDF8"/>
+                </a:solidFill>
+              </a:rPr>
+              <a:t>☁️ GEE Feeds</a:t>
+            </a:r>
+          </a:p>
+        </p:txBody>
+      </p:sp>
+      <p:sp>
+        <p:nvSpPr>
+          <p:cNvPr id="7" name="TextBox 6"/>
+          <p:cNvSpPr txBox="1"/>
+          <p:nvPr/>
+        </p:nvSpPr>
+        <p:spPr>
+          <a:xfrm>
+            <a:off x="274320" y="1463040"/>
+            <a:ext cx="2011680" cy="1097280"/>
+          </a:xfrm>
+          <a:prstGeom prst="rect">
+            <a:avLst/>
+          </a:prstGeom>
+          <a:noFill/>
+        </p:spPr>
+        <p:txBody>
+          <a:bodyPr wrap="square">
+            <a:spAutoFit/>
+          </a:bodyPr>
+          <a:lstStyle/>
+          <a:p>
+            <a:pPr algn="ctr"/>
+            <a:r>
+              <a:rPr sz="1000" b="0" i="0">
+                <a:solidFill>
+                  <a:srgbClr val="B0BEC5"/>
+                </a:solidFill>
+              </a:rPr>
+              <a:t>Sentinel-1 SAR
+Sentinel-2
+NASADEM DEM</a:t>
+            </a:r>
+          </a:p>
+        </p:txBody>
+      </p:sp>
+      <p:sp>
+        <p:nvSpPr>
+          <p:cNvPr id="8" name="Rectangle 7"/>
+          <p:cNvSpPr/>
+          <p:nvPr/>
+        </p:nvSpPr>
+        <p:spPr>
+          <a:xfrm>
+            <a:off x="2560320" y="1005840"/>
+            <a:ext cx="2011680" cy="1645920"/>
+          </a:xfrm>
+          <a:prstGeom prst="rect">
+            <a:avLst/>
+          </a:prstGeom>
+          <a:solidFill>
+            <a:srgbClr val="1E293B"/>
+          </a:solidFill>
+          <a:ln>
+            <a:solidFill>
+              <a:srgbClr val="38BDF8"/>
+            </a:solidFill>
+          </a:ln>
+        </p:spPr>
+        <p:style>
+          <a:lnRef idx="1">
+            <a:schemeClr val="accent1"/>
+          </a:lnRef>
+          <a:fillRef idx="3">
+            <a:schemeClr val="accent1"/>
+          </a:fillRef>
+          <a:effectRef idx="2">
+            <a:schemeClr val="accent1"/>
+          </a:effectRef>
+          <a:fontRef idx="minor">
+            <a:schemeClr val="lt1"/>
+          </a:fontRef>
+        </p:style>
+        <p:txBody>
+          <a:bodyPr rtlCol="0" anchor="ctr"/>
+          <a:lstStyle/>
+          <a:p>
+            <a:pPr algn="ctr"/>
+          </a:p>
+        </p:txBody>
+      </p:sp>
+      <p:sp>
+        <p:nvSpPr>
+          <p:cNvPr id="9" name="TextBox 8"/>
+          <p:cNvSpPr txBox="1"/>
+          <p:nvPr/>
+        </p:nvSpPr>
+        <p:spPr>
+          <a:xfrm>
+            <a:off x="2560320" y="1051560"/>
+            <a:ext cx="2011680" cy="411480"/>
+          </a:xfrm>
+          <a:prstGeom prst="rect">
+            <a:avLst/>
+          </a:prstGeom>
+          <a:noFill/>
+        </p:spPr>
+        <p:txBody>
+          <a:bodyPr wrap="square">
+            <a:spAutoFit/>
+          </a:bodyPr>
+          <a:lstStyle/>
+          <a:p>
+            <a:pPr algn="ctr"/>
+            <a:r>
+              <a:rPr sz="1300" b="1" i="0">
+                <a:solidFill>
+                  <a:srgbClr val="38BDF8"/>
+                </a:solidFill>
+              </a:rPr>
+              <a:t>🌦️ Meteorological</a:t>
+            </a:r>
+          </a:p>
+        </p:txBody>
+      </p:sp>
+      <p:sp>
+        <p:nvSpPr>
+          <p:cNvPr id="10" name="TextBox 9"/>
+          <p:cNvSpPr txBox="1"/>
+          <p:nvPr/>
+        </p:nvSpPr>
+        <p:spPr>
+          <a:xfrm>
+            <a:off x="2560320" y="1463040"/>
+            <a:ext cx="2011680" cy="1097280"/>
+          </a:xfrm>
+          <a:prstGeom prst="rect">
+            <a:avLst/>
+          </a:prstGeom>
+          <a:noFill/>
+        </p:spPr>
+        <p:txBody>
+          <a:bodyPr wrap="square">
+            <a:spAutoFit/>
+          </a:bodyPr>
+          <a:lstStyle/>
+          <a:p>
+            <a:pPr algn="ctr"/>
+            <a:r>
+              <a:rPr sz="1000" b="0" i="0">
+                <a:solidFill>
+                  <a:srgbClr val="B0BEC5"/>
+                </a:solidFill>
+              </a:rPr>
+              <a:t>NOAA / IMD
+Open-Meteo
+Cyclone Tracks</a:t>
+            </a:r>
+          </a:p>
+        </p:txBody>
+      </p:sp>
+      <p:sp>
+        <p:nvSpPr>
+          <p:cNvPr id="11" name="Rectangle 10"/>
+          <p:cNvSpPr/>
+          <p:nvPr/>
+        </p:nvSpPr>
+        <p:spPr>
+          <a:xfrm>
+            <a:off x="4846320" y="1005840"/>
+            <a:ext cx="2011680" cy="1645920"/>
+          </a:xfrm>
+          <a:prstGeom prst="rect">
+            <a:avLst/>
+          </a:prstGeom>
+          <a:solidFill>
+            <a:srgbClr val="1E293B"/>
+          </a:solidFill>
+          <a:ln>
+            <a:solidFill>
+              <a:srgbClr val="38BDF8"/>
+            </a:solidFill>
+          </a:ln>
+        </p:spPr>
+        <p:style>
+          <a:lnRef idx="1">
+            <a:schemeClr val="accent1"/>
+          </a:lnRef>
+          <a:fillRef idx="3">
+            <a:schemeClr val="accent1"/>
+          </a:fillRef>
+          <a:effectRef idx="2">
+            <a:schemeClr val="accent1"/>
+          </a:effectRef>
+          <a:fontRef idx="minor">
+            <a:schemeClr val="lt1"/>
+          </a:fontRef>
+        </p:style>
+        <p:txBody>
+          <a:bodyPr rtlCol="0" anchor="ctr"/>
+          <a:lstStyle/>
+          <a:p>
+            <a:pPr algn="ctr"/>
+          </a:p>
+        </p:txBody>
+      </p:sp>
+      <p:sp>
+        <p:nvSpPr>
+          <p:cNvPr id="12" name="TextBox 11"/>
+          <p:cNvSpPr txBox="1"/>
+          <p:nvPr/>
+        </p:nvSpPr>
+        <p:spPr>
+          <a:xfrm>
+            <a:off x="4846320" y="1051560"/>
+            <a:ext cx="2011680" cy="411480"/>
+          </a:xfrm>
+          <a:prstGeom prst="rect">
+            <a:avLst/>
+          </a:prstGeom>
+          <a:noFill/>
+        </p:spPr>
+        <p:txBody>
+          <a:bodyPr wrap="square">
+            <a:spAutoFit/>
+          </a:bodyPr>
+          <a:lstStyle/>
+          <a:p>
+            <a:pPr algn="ctr"/>
+            <a:r>
+              <a:rPr sz="1300" b="1" i="0">
+                <a:solidFill>
+                  <a:srgbClr val="38BDF8"/>
+                </a:solidFill>
+              </a:rPr>
+              <a:t>🗺️ OpenStreetMap</a:t>
+            </a:r>
+          </a:p>
+        </p:txBody>
+      </p:sp>
+      <p:sp>
+        <p:nvSpPr>
+          <p:cNvPr id="13" name="TextBox 12"/>
+          <p:cNvSpPr txBox="1"/>
+          <p:nvPr/>
+        </p:nvSpPr>
+        <p:spPr>
+          <a:xfrm>
+            <a:off x="4846320" y="1463040"/>
+            <a:ext cx="2011680" cy="1097280"/>
+          </a:xfrm>
+          <a:prstGeom prst="rect">
+            <a:avLst/>
+          </a:prstGeom>
+          <a:noFill/>
+        </p:spPr>
+        <p:txBody>
+          <a:bodyPr wrap="square">
+            <a:spAutoFit/>
+          </a:bodyPr>
+          <a:lstStyle/>
+          <a:p>
+            <a:pPr algn="ctr"/>
+            <a:r>
+              <a:rPr sz="1000" b="0" i="0">
+                <a:solidFill>
+                  <a:srgbClr val="B0BEC5"/>
+                </a:solidFill>
+              </a:rPr>
+              <a:t>Hospitals
+Roads &amp; Bridges
+Power Sub-stations</a:t>
+            </a:r>
+          </a:p>
+        </p:txBody>
+      </p:sp>
+      <p:sp>
+        <p:nvSpPr>
+          <p:cNvPr id="14" name="TextBox 13"/>
+          <p:cNvSpPr txBox="1"/>
+          <p:nvPr/>
+        </p:nvSpPr>
+        <p:spPr>
+          <a:xfrm>
+            <a:off x="274320" y="2743200"/>
+            <a:ext cx="11887200" cy="365760"/>
+          </a:xfrm>
+          <a:prstGeom prst="rect">
+            <a:avLst/>
+          </a:prstGeom>
+          <a:noFill/>
+        </p:spPr>
+        <p:txBody>
+          <a:bodyPr wrap="square">
+            <a:spAutoFit/>
+          </a:bodyPr>
+          <a:lstStyle/>
+          <a:p>
+            <a:pPr algn="ctr"/>
+            <a:r>
+              <a:rPr sz="1100" b="0" i="0">
+                <a:solidFill>
+                  <a:srgbClr val="B0BEC5"/>
+                </a:solidFill>
+              </a:rPr>
+              <a:t>▼ feeds into</a:t>
+            </a:r>
+          </a:p>
+        </p:txBody>
+      </p:sp>
+      <p:sp>
+        <p:nvSpPr>
+          <p:cNvPr id="15" name="Rectangle 14"/>
+          <p:cNvSpPr/>
+          <p:nvPr/>
+        </p:nvSpPr>
+        <p:spPr>
+          <a:xfrm>
+            <a:off x="3200400" y="3200400"/>
+            <a:ext cx="5760720" cy="1188720"/>
+          </a:xfrm>
+          <a:prstGeom prst="rect">
+            <a:avLst/>
+          </a:prstGeom>
+          <a:solidFill>
+            <a:srgbClr val="1E293B"/>
+          </a:solidFill>
+          <a:ln>
+            <a:solidFill>
+              <a:srgbClr val="1E88E5"/>
+            </a:solidFill>
+          </a:ln>
+        </p:spPr>
+        <p:style>
+          <a:lnRef idx="1">
+            <a:schemeClr val="accent1"/>
+          </a:lnRef>
+          <a:fillRef idx="3">
+            <a:schemeClr val="accent1"/>
+          </a:fillRef>
+          <a:effectRef idx="2">
+            <a:schemeClr val="accent1"/>
+          </a:effectRef>
+          <a:fontRef idx="minor">
+            <a:schemeClr val="lt1"/>
+          </a:fontRef>
+        </p:style>
+        <p:txBody>
+          <a:bodyPr rtlCol="0" anchor="ctr"/>
+          <a:lstStyle/>
+          <a:p>
+            <a:pPr algn="ctr"/>
+          </a:p>
+        </p:txBody>
+      </p:sp>
+      <p:sp>
+        <p:nvSpPr>
+          <p:cNvPr id="16" name="TextBox 15"/>
+          <p:cNvSpPr txBox="1"/>
+          <p:nvPr/>
+        </p:nvSpPr>
+        <p:spPr>
+          <a:xfrm>
+            <a:off x="3200400" y="3246120"/>
+            <a:ext cx="5760720" cy="457200"/>
+          </a:xfrm>
+          <a:prstGeom prst="rect">
+            <a:avLst/>
+          </a:prstGeom>
+          <a:noFill/>
+        </p:spPr>
+        <p:txBody>
+          <a:bodyPr wrap="square">
+            <a:spAutoFit/>
+          </a:bodyPr>
+          <a:lstStyle/>
+          <a:p>
+            <a:pPr algn="ctr"/>
+            <a:r>
+              <a:rPr sz="1400" b="1" i="0">
+                <a:solidFill>
+                  <a:srgbClr val="1E88E5"/>
+                </a:solidFill>
+              </a:rPr>
+              <a:t>🧠 Gemini 1.5 Flash — Multimodal Decision Engine</a:t>
+            </a:r>
+          </a:p>
+        </p:txBody>
+      </p:sp>
+      <p:sp>
+        <p:nvSpPr>
+          <p:cNvPr id="17" name="TextBox 16"/>
+          <p:cNvSpPr txBox="1"/>
+          <p:nvPr/>
+        </p:nvSpPr>
+        <p:spPr>
+          <a:xfrm>
+            <a:off x="3200400" y="3703320"/>
+            <a:ext cx="5760720" cy="502920"/>
+          </a:xfrm>
+          <a:prstGeom prst="rect">
+            <a:avLst/>
+          </a:prstGeom>
+          <a:noFill/>
+        </p:spPr>
+        <p:txBody>
+          <a:bodyPr wrap="square">
+            <a:spAutoFit/>
+          </a:bodyPr>
+          <a:lstStyle/>
+          <a:p>
+            <a:pPr algn="ctr"/>
+            <a:r>
+              <a:rPr sz="1100" b="0" i="0">
+                <a:solidFill>
+                  <a:srgbClr val="B0BEC5"/>
+                </a:solidFill>
+              </a:rPr>
+              <a:t>Synthesizes elevation + telemetry + infrastructure graphs</a:t>
+            </a:r>
+          </a:p>
+        </p:txBody>
+      </p:sp>
+      <p:sp>
+        <p:nvSpPr>
+          <p:cNvPr id="18" name="TextBox 17"/>
+          <p:cNvSpPr txBox="1"/>
+          <p:nvPr/>
+        </p:nvSpPr>
+        <p:spPr>
+          <a:xfrm>
+            <a:off x="274320" y="4434840"/>
+            <a:ext cx="11887200" cy="365760"/>
+          </a:xfrm>
+          <a:prstGeom prst="rect">
+            <a:avLst/>
+          </a:prstGeom>
+          <a:noFill/>
+        </p:spPr>
+        <p:txBody>
+          <a:bodyPr wrap="square">
+            <a:spAutoFit/>
+          </a:bodyPr>
+          <a:lstStyle/>
+          <a:p>
+            <a:pPr algn="ctr"/>
+            <a:r>
+              <a:rPr sz="1100" b="0" i="0">
+                <a:solidFill>
+                  <a:srgbClr val="B0BEC5"/>
+                </a:solidFill>
+              </a:rPr>
+              <a:t>▼ outputs</a:t>
+            </a:r>
+          </a:p>
+        </p:txBody>
+      </p:sp>
+      <p:sp>
+        <p:nvSpPr>
+          <p:cNvPr id="19" name="Rectangle 18"/>
+          <p:cNvSpPr/>
+          <p:nvPr/>
+        </p:nvSpPr>
+        <p:spPr>
+          <a:xfrm>
+            <a:off x="1371600" y="4846320"/>
+            <a:ext cx="3017520" cy="822960"/>
+          </a:xfrm>
+          <a:prstGeom prst="rect">
+            <a:avLst/>
+          </a:prstGeom>
+          <a:solidFill>
+            <a:srgbClr val="1E293B"/>
+          </a:solidFill>
+          <a:ln>
+            <a:solidFill>
+              <a:srgbClr val="1E88E5"/>
+            </a:solidFill>
+          </a:ln>
+        </p:spPr>
+        <p:style>
+          <a:lnRef idx="1">
+            <a:schemeClr val="accent1"/>
+          </a:lnRef>
+          <a:fillRef idx="3">
+            <a:schemeClr val="accent1"/>
+          </a:fillRef>
+          <a:effectRef idx="2">
+            <a:schemeClr val="accent1"/>
+          </a:effectRef>
+          <a:fontRef idx="minor">
+            <a:schemeClr val="lt1"/>
+          </a:fontRef>
+        </p:style>
+        <p:txBody>
+          <a:bodyPr rtlCol="0" anchor="ctr"/>
+          <a:lstStyle/>
+          <a:p>
+            <a:pPr algn="ctr"/>
+          </a:p>
+        </p:txBody>
+      </p:sp>
+      <p:sp>
+        <p:nvSpPr>
+          <p:cNvPr id="20" name="TextBox 19"/>
+          <p:cNvSpPr txBox="1"/>
+          <p:nvPr/>
+        </p:nvSpPr>
+        <p:spPr>
+          <a:xfrm>
+            <a:off x="1371600" y="4919472"/>
+            <a:ext cx="3017520" cy="640080"/>
+          </a:xfrm>
+          <a:prstGeom prst="rect">
+            <a:avLst/>
+          </a:prstGeom>
+          <a:noFill/>
+        </p:spPr>
+        <p:txBody>
+          <a:bodyPr wrap="square">
+            <a:spAutoFit/>
+          </a:bodyPr>
+          <a:lstStyle/>
+          <a:p>
+            <a:pPr algn="ctr"/>
+            <a:r>
+              <a:rPr sz="1200" b="1" i="0">
+                <a:solidFill>
+                  <a:srgbClr val="1E88E5"/>
+                </a:solidFill>
+              </a:rPr>
+              <a:t>🗺️ Inundation Map</a:t>
+            </a:r>
+          </a:p>
+        </p:txBody>
+      </p:sp>
+      <p:sp>
+        <p:nvSpPr>
+          <p:cNvPr id="21" name="Rectangle 20"/>
+          <p:cNvSpPr/>
+          <p:nvPr/>
+        </p:nvSpPr>
+        <p:spPr>
+          <a:xfrm>
+            <a:off x="4846320" y="4846320"/>
+            <a:ext cx="3017520" cy="822960"/>
+          </a:xfrm>
+          <a:prstGeom prst="rect">
+            <a:avLst/>
+          </a:prstGeom>
+          <a:solidFill>
+            <a:srgbClr val="1E293B"/>
+          </a:solidFill>
+          <a:ln>
+            <a:solidFill>
+              <a:srgbClr val="10B981"/>
+            </a:solidFill>
+          </a:ln>
+        </p:spPr>
+        <p:style>
+          <a:lnRef idx="1">
+            <a:schemeClr val="accent1"/>
+          </a:lnRef>
+          <a:fillRef idx="3">
+            <a:schemeClr val="accent1"/>
+          </a:fillRef>
+          <a:effectRef idx="2">
+            <a:schemeClr val="accent1"/>
+          </a:effectRef>
+          <a:fontRef idx="minor">
+            <a:schemeClr val="lt1"/>
+          </a:fontRef>
+        </p:style>
+        <p:txBody>
+          <a:bodyPr rtlCol="0" anchor="ctr"/>
+          <a:lstStyle/>
+          <a:p>
+            <a:pPr algn="ctr"/>
+          </a:p>
+        </p:txBody>
+      </p:sp>
+      <p:sp>
+        <p:nvSpPr>
+          <p:cNvPr id="22" name="TextBox 21"/>
+          <p:cNvSpPr txBox="1"/>
+          <p:nvPr/>
+        </p:nvSpPr>
+        <p:spPr>
+          <a:xfrm>
+            <a:off x="4846320" y="4919472"/>
+            <a:ext cx="3017520" cy="640080"/>
+          </a:xfrm>
+          <a:prstGeom prst="rect">
+            <a:avLst/>
+          </a:prstGeom>
+          <a:noFill/>
+        </p:spPr>
+        <p:txBody>
+          <a:bodyPr wrap="square">
+            <a:spAutoFit/>
+          </a:bodyPr>
+          <a:lstStyle/>
+          <a:p>
+            <a:pPr algn="ctr"/>
+            <a:r>
+              <a:rPr sz="1200" b="1" i="0">
+                <a:solidFill>
+                  <a:srgbClr val="10B981"/>
+                </a:solidFill>
+              </a:rPr>
+              <a:t>📱 Multi-Lingual Alerts</a:t>
+            </a:r>
+          </a:p>
+        </p:txBody>
+      </p:sp>
+      <p:sp>
+        <p:nvSpPr>
+          <p:cNvPr id="23" name="Rectangle 22"/>
+          <p:cNvSpPr/>
+          <p:nvPr/>
+        </p:nvSpPr>
+        <p:spPr>
+          <a:xfrm>
+            <a:off x="8321040" y="4846320"/>
+            <a:ext cx="3017520" cy="822960"/>
+          </a:xfrm>
+          <a:prstGeom prst="rect">
+            <a:avLst/>
+          </a:prstGeom>
+          <a:solidFill>
+            <a:srgbClr val="1E293B"/>
+          </a:solidFill>
+          <a:ln>
+            <a:solidFill>
+              <a:srgbClr val="F59E0B"/>
+            </a:solidFill>
+          </a:ln>
+        </p:spPr>
+        <p:style>
+          <a:lnRef idx="1">
+            <a:schemeClr val="accent1"/>
+          </a:lnRef>
+          <a:fillRef idx="3">
+            <a:schemeClr val="accent1"/>
+          </a:fillRef>
+          <a:effectRef idx="2">
+            <a:schemeClr val="accent1"/>
+          </a:effectRef>
+          <a:fontRef idx="minor">
+            <a:schemeClr val="lt1"/>
+          </a:fontRef>
+        </p:style>
+        <p:txBody>
+          <a:bodyPr rtlCol="0" anchor="ctr"/>
+          <a:lstStyle/>
+          <a:p>
+            <a:pPr algn="ctr"/>
+          </a:p>
+        </p:txBody>
+      </p:sp>
+      <p:sp>
+        <p:nvSpPr>
+          <p:cNvPr id="24" name="TextBox 23"/>
+          <p:cNvSpPr txBox="1"/>
+          <p:nvPr/>
+        </p:nvSpPr>
+        <p:spPr>
+          <a:xfrm>
+            <a:off x="8321040" y="4919472"/>
+            <a:ext cx="3017520" cy="640080"/>
+          </a:xfrm>
+          <a:prstGeom prst="rect">
+            <a:avLst/>
+          </a:prstGeom>
+          <a:noFill/>
+        </p:spPr>
+        <p:txBody>
+          <a:bodyPr wrap="square">
+            <a:spAutoFit/>
+          </a:bodyPr>
+          <a:lstStyle/>
+          <a:p>
+            <a:pPr algn="ctr"/>
+            <a:r>
+              <a:rPr sz="1200" b="1" i="0">
+                <a:solidFill>
+                  <a:srgbClr val="F59E0B"/>
+                </a:solidFill>
+              </a:rPr>
+              <a:t>💳 Insurance Score</a:t>
+            </a:r>
+          </a:p>
+        </p:txBody>
+      </p:sp>
+      <p:sp>
+        <p:nvSpPr>
+          <p:cNvPr id="25" name="TextBox 24"/>
+          <p:cNvSpPr txBox="1"/>
+          <p:nvPr/>
+        </p:nvSpPr>
+        <p:spPr>
+          <a:xfrm>
+            <a:off x="274320" y="5943600"/>
+            <a:ext cx="11887200" cy="457200"/>
+          </a:xfrm>
+          <a:prstGeom prst="rect">
+            <a:avLst/>
+          </a:prstGeom>
+          <a:noFill/>
+        </p:spPr>
+        <p:txBody>
+          <a:bodyPr wrap="square">
+            <a:spAutoFit/>
+          </a:bodyPr>
+          <a:lstStyle/>
+          <a:p>
+            <a:pPr algn="ctr"/>
+            <a:r>
+              <a:rPr sz="1100" b="0" i="1">
+                <a:solidFill>
+                  <a:srgbClr val="B0BEC5"/>
+                </a:solidFill>
+              </a:rPr>
+              <a:t>Deployed on Streamlit Cloud  •  Containerized via Docker</a:t>
+            </a:r>
+          </a:p>
+        </p:txBody>
+      </p:sp>
+    </p:spTree>
+  </p:cSld>
+  <p:clrMapOvr>
+    <a:masterClrMapping/>
+  </p:clrMapOvr>
+</p:sld>
+</file>
+
+<file path=ppt/slides/slide7.xml><?xml version="1.0" encoding="utf-8"?>
+<p:sld xmlns:a="http://schemas.openxmlformats.org/drawingml/2006/main" xmlns:p="http://schemas.openxmlformats.org/presentationml/2006/main" xmlns:r="http://schemas.openxmlformats.org/officeDocument/2006/relationships">
+  <p:cSld>
+    <p:bg>
+      <p:bgPr>
+        <a:solidFill>
+          <a:srgbClr val="0F172A"/>
+        </a:solidFill>
+        <a:effectLst/>
+      </p:bgPr>
+    </p:bg>
+    <p:spTree>
+      <p:nvGrpSpPr>
+        <p:cNvPr id="1" name=""/>
+        <p:cNvGrpSpPr/>
+        <p:nvPr/>
+      </p:nvGrpSpPr>
+      <p:grpSpPr/>
+      <p:sp>
+        <p:nvSpPr>
+          <p:cNvPr id="2" name="Rectangle 1"/>
+          <p:cNvSpPr/>
+          <p:nvPr/>
+        </p:nvSpPr>
+        <p:spPr>
+          <a:xfrm>
+            <a:off x="0" y="0"/>
+            <a:ext cx="12188952" cy="73152"/>
+          </a:xfrm>
+          <a:prstGeom prst="rect">
+            <a:avLst/>
+          </a:prstGeom>
+          <a:solidFill>
+            <a:srgbClr val="10B981"/>
+          </a:solidFill>
+          <a:ln>
+            <a:noFill/>
+          </a:ln>
+        </p:spPr>
+        <p:style>
+          <a:lnRef idx="1">
+            <a:schemeClr val="accent1"/>
+          </a:lnRef>
+          <a:fillRef idx="3">
+            <a:schemeClr val="accent1"/>
+          </a:fillRef>
+          <a:effectRef idx="2">
+            <a:schemeClr val="accent1"/>
+          </a:effectRef>
+          <a:fontRef idx="minor">
+            <a:schemeClr val="lt1"/>
+          </a:fontRef>
+        </p:style>
+        <p:txBody>
+          <a:bodyPr rtlCol="0" anchor="ctr"/>
+          <a:lstStyle/>
+          <a:p>
+            <a:pPr algn="ctr"/>
+          </a:p>
+        </p:txBody>
+      </p:sp>
+      <p:sp>
+        <p:nvSpPr>
+          <p:cNvPr id="3" name="Rectangle 2"/>
+          <p:cNvSpPr/>
+          <p:nvPr/>
+        </p:nvSpPr>
+        <p:spPr>
+          <a:xfrm>
+            <a:off x="0" y="914400"/>
+            <a:ext cx="54864" cy="5943600"/>
+          </a:xfrm>
+          <a:prstGeom prst="rect">
+            <a:avLst/>
+          </a:prstGeom>
+          <a:solidFill>
+            <a:srgbClr val="10B981"/>
+          </a:solidFill>
+          <a:ln>
+            <a:noFill/>
+          </a:ln>
+        </p:spPr>
+        <p:style>
+          <a:lnRef idx="1">
+            <a:schemeClr val="accent1"/>
+          </a:lnRef>
+          <a:fillRef idx="3">
+            <a:schemeClr val="accent1"/>
+          </a:fillRef>
+          <a:effectRef idx="2">
+            <a:schemeClr val="accent1"/>
+          </a:effectRef>
+          <a:fontRef idx="minor">
+            <a:schemeClr val="lt1"/>
+          </a:fontRef>
+        </p:style>
+        <p:txBody>
+          <a:bodyPr rtlCol="0" anchor="ctr"/>
+          <a:lstStyle/>
+          <a:p>
+            <a:pPr algn="ctr"/>
+          </a:p>
+        </p:txBody>
+      </p:sp>
+      <p:sp>
+        <p:nvSpPr>
+          <p:cNvPr id="4" name="TextBox 3"/>
+          <p:cNvSpPr txBox="1"/>
+          <p:nvPr/>
+        </p:nvSpPr>
+        <p:spPr>
+          <a:xfrm>
+            <a:off x="274320" y="137160"/>
+            <a:ext cx="10058400" cy="640080"/>
+          </a:xfrm>
+          <a:prstGeom prst="rect">
+            <a:avLst/>
+          </a:prstGeom>
+          <a:noFill/>
+        </p:spPr>
+        <p:txBody>
+          <a:bodyPr wrap="square">
+            <a:spAutoFit/>
+          </a:bodyPr>
+          <a:lstStyle/>
+          <a:p>
+            <a:pPr algn="l"/>
+            <a:r>
+              <a:rPr sz="3000" b="1" i="0">
+                <a:solidFill>
+                  <a:srgbClr val="10B981"/>
+                </a:solidFill>
+              </a:rPr>
+              <a:t>🚀 Live Demo Walkthrough</a:t>
+            </a:r>
+          </a:p>
+        </p:txBody>
+      </p:sp>
+      <p:sp>
+        <p:nvSpPr>
+          <p:cNvPr id="5" name="TextBox 4"/>
+          <p:cNvSpPr txBox="1"/>
+          <p:nvPr/>
+        </p:nvSpPr>
+        <p:spPr>
+          <a:xfrm>
+            <a:off x="274320" y="731520"/>
+            <a:ext cx="10972800" cy="365760"/>
+          </a:xfrm>
+          <a:prstGeom prst="rect">
+            <a:avLst/>
+          </a:prstGeom>
+          <a:noFill/>
+        </p:spPr>
+        <p:txBody>
+          <a:bodyPr wrap="square">
+            <a:spAutoFit/>
+          </a:bodyPr>
+          <a:lstStyle/>
+          <a:p>
+            <a:pPr algn="l"/>
+            <a:r>
+              <a:rPr sz="1300" b="0" i="1">
+                <a:solidFill>
+                  <a:srgbClr val="38BDF8"/>
+                </a:solidFill>
+              </a:rPr>
+              <a:t>Prototype: https://efomw9k5jde5gwkxe3ybuj.streamlit.app/</a:t>
+            </a:r>
+          </a:p>
+        </p:txBody>
+      </p:sp>
+      <p:sp>
+        <p:nvSpPr>
+          <p:cNvPr id="6" name="Rectangle 5"/>
+          <p:cNvSpPr/>
+          <p:nvPr/>
+        </p:nvSpPr>
+        <p:spPr>
+          <a:xfrm>
+            <a:off x="274320" y="1280160"/>
+            <a:ext cx="1005840" cy="1097280"/>
+          </a:xfrm>
+          <a:prstGeom prst="rect">
+            <a:avLst/>
+          </a:prstGeom>
+          <a:solidFill>
+            <a:srgbClr val="1E88E5"/>
+          </a:solidFill>
+          <a:ln>
+            <a:noFill/>
+          </a:ln>
+        </p:spPr>
+        <p:style>
+          <a:lnRef idx="1">
+            <a:schemeClr val="accent1"/>
+          </a:lnRef>
+          <a:fillRef idx="3">
+            <a:schemeClr val="accent1"/>
+          </a:fillRef>
+          <a:effectRef idx="2">
+            <a:schemeClr val="accent1"/>
+          </a:effectRef>
+          <a:fontRef idx="minor">
+            <a:schemeClr val="lt1"/>
+          </a:fontRef>
+        </p:style>
+        <p:txBody>
+          <a:bodyPr rtlCol="0" anchor="ctr"/>
+          <a:lstStyle/>
+          <a:p>
+            <a:pPr algn="ctr"/>
+          </a:p>
+        </p:txBody>
+      </p:sp>
+      <p:sp>
+        <p:nvSpPr>
+          <p:cNvPr id="7" name="TextBox 6"/>
+          <p:cNvSpPr txBox="1"/>
+          <p:nvPr/>
+        </p:nvSpPr>
+        <p:spPr>
+          <a:xfrm>
+            <a:off x="274320" y="1554480"/>
+            <a:ext cx="1005840" cy="457200"/>
+          </a:xfrm>
+          <a:prstGeom prst="rect">
+            <a:avLst/>
+          </a:prstGeom>
+          <a:noFill/>
+        </p:spPr>
+        <p:txBody>
+          <a:bodyPr wrap="square">
+            <a:spAutoFit/>
+          </a:bodyPr>
+          <a:lstStyle/>
+          <a:p>
+            <a:pPr algn="ctr"/>
+            <a:r>
+              <a:rPr sz="1100" b="1" i="0">
+                <a:solidFill>
+                  <a:srgbClr val="FFFFFF"/>
+                </a:solidFill>
+              </a:rPr>
+              <a:t>Step 1</a:t>
+            </a:r>
+          </a:p>
+        </p:txBody>
+      </p:sp>
+      <p:sp>
+        <p:nvSpPr>
+          <p:cNvPr id="8" name="Rectangle 7"/>
+          <p:cNvSpPr/>
+          <p:nvPr/>
+        </p:nvSpPr>
+        <p:spPr>
+          <a:xfrm>
+            <a:off x="1417320" y="1280160"/>
+            <a:ext cx="10515600" cy="1097280"/>
+          </a:xfrm>
+          <a:prstGeom prst="rect">
+            <a:avLst/>
+          </a:prstGeom>
+          <a:solidFill>
+            <a:srgbClr val="1E293B"/>
+          </a:solidFill>
+          <a:ln>
+            <a:noFill/>
+          </a:ln>
+        </p:spPr>
+        <p:style>
+          <a:lnRef idx="1">
+            <a:schemeClr val="accent1"/>
+          </a:lnRef>
+          <a:fillRef idx="3">
+            <a:schemeClr val="accent1"/>
+          </a:fillRef>
+          <a:effectRef idx="2">
+            <a:schemeClr val="accent1"/>
+          </a:effectRef>
+          <a:fontRef idx="minor">
+            <a:schemeClr val="lt1"/>
+          </a:fontRef>
+        </p:style>
+        <p:txBody>
+          <a:bodyPr rtlCol="0" anchor="ctr"/>
+          <a:lstStyle/>
+          <a:p>
+            <a:pPr algn="ctr"/>
+          </a:p>
+        </p:txBody>
+      </p:sp>
+      <p:sp>
+        <p:nvSpPr>
+          <p:cNvPr id="9" name="TextBox 8"/>
+          <p:cNvSpPr txBox="1"/>
+          <p:nvPr/>
+        </p:nvSpPr>
+        <p:spPr>
+          <a:xfrm>
+            <a:off x="1554480" y="1325880"/>
+            <a:ext cx="10149840" cy="365760"/>
+          </a:xfrm>
+          <a:prstGeom prst="rect">
+            <a:avLst/>
+          </a:prstGeom>
+          <a:noFill/>
+        </p:spPr>
+        <p:txBody>
+          <a:bodyPr wrap="square">
+            <a:spAutoFit/>
+          </a:bodyPr>
+          <a:lstStyle/>
+          <a:p>
+            <a:pPr algn="l"/>
+            <a:r>
+              <a:rPr sz="1300" b="1" i="0">
+                <a:solidFill>
+                  <a:srgbClr val="FFFFFF"/>
+                </a:solidFill>
+              </a:rPr>
+              <a:t>Select a target coastal sector (e.g., Bay of Bengal — Odisha / West Bengal)</a:t>
+            </a:r>
+          </a:p>
+        </p:txBody>
+      </p:sp>
+      <p:sp>
+        <p:nvSpPr>
+          <p:cNvPr id="10" name="TextBox 9"/>
+          <p:cNvSpPr txBox="1"/>
+          <p:nvPr/>
+        </p:nvSpPr>
+        <p:spPr>
+          <a:xfrm>
+            <a:off x="1554480" y="1737360"/>
+            <a:ext cx="10149840" cy="548640"/>
+          </a:xfrm>
+          <a:prstGeom prst="rect">
+            <a:avLst/>
+          </a:prstGeom>
+          <a:noFill/>
+        </p:spPr>
+        <p:txBody>
+          <a:bodyPr wrap="square">
+            <a:spAutoFit/>
+          </a:bodyPr>
+          <a:lstStyle/>
+          <a:p>
+            <a:pPr algn="l"/>
+            <a:r>
+              <a:rPr sz="1100" b="0" i="0">
+                <a:solidFill>
+                  <a:srgbClr val="B0BEC5"/>
+                </a:solidFill>
+              </a:rPr>
+              <a:t>Use the sidebar dropdown to choose the region and observe the GIS map center change in real-time.</a:t>
+            </a:r>
+          </a:p>
+        </p:txBody>
+      </p:sp>
+      <p:sp>
+        <p:nvSpPr>
+          <p:cNvPr id="11" name="Rectangle 10"/>
+          <p:cNvSpPr/>
+          <p:nvPr/>
+        </p:nvSpPr>
+        <p:spPr>
+          <a:xfrm>
+            <a:off x="274320" y="2606039"/>
+            <a:ext cx="1005840" cy="1097280"/>
+          </a:xfrm>
+          <a:prstGeom prst="rect">
+            <a:avLst/>
+          </a:prstGeom>
+          <a:solidFill>
+            <a:srgbClr val="1E88E5"/>
+          </a:solidFill>
+          <a:ln>
+            <a:noFill/>
+          </a:ln>
+        </p:spPr>
+        <p:style>
+          <a:lnRef idx="1">
+            <a:schemeClr val="accent1"/>
+          </a:lnRef>
+          <a:fillRef idx="3">
+            <a:schemeClr val="accent1"/>
+          </a:fillRef>
+          <a:effectRef idx="2">
+            <a:schemeClr val="accent1"/>
+          </a:effectRef>
+          <a:fontRef idx="minor">
+            <a:schemeClr val="lt1"/>
+          </a:fontRef>
+        </p:style>
+        <p:txBody>
+          <a:bodyPr rtlCol="0" anchor="ctr"/>
+          <a:lstStyle/>
+          <a:p>
+            <a:pPr algn="ctr"/>
+          </a:p>
+        </p:txBody>
+      </p:sp>
+      <p:sp>
+        <p:nvSpPr>
+          <p:cNvPr id="12" name="TextBox 11"/>
+          <p:cNvSpPr txBox="1"/>
+          <p:nvPr/>
+        </p:nvSpPr>
+        <p:spPr>
+          <a:xfrm>
+            <a:off x="274320" y="2880359"/>
+            <a:ext cx="1005840" cy="457200"/>
+          </a:xfrm>
+          <a:prstGeom prst="rect">
+            <a:avLst/>
+          </a:prstGeom>
+          <a:noFill/>
+        </p:spPr>
+        <p:txBody>
+          <a:bodyPr wrap="square">
+            <a:spAutoFit/>
+          </a:bodyPr>
+          <a:lstStyle/>
+          <a:p>
+            <a:pPr algn="ctr"/>
+            <a:r>
+              <a:rPr sz="1100" b="1" i="0">
+                <a:solidFill>
+                  <a:srgbClr val="FFFFFF"/>
+                </a:solidFill>
+              </a:rPr>
+              <a:t>Step 2</a:t>
+            </a:r>
+          </a:p>
+        </p:txBody>
+      </p:sp>
+      <p:sp>
+        <p:nvSpPr>
+          <p:cNvPr id="13" name="Rectangle 12"/>
+          <p:cNvSpPr/>
+          <p:nvPr/>
+        </p:nvSpPr>
+        <p:spPr>
+          <a:xfrm>
+            <a:off x="1417320" y="2606039"/>
+            <a:ext cx="10515600" cy="1097280"/>
+          </a:xfrm>
+          <a:prstGeom prst="rect">
+            <a:avLst/>
+          </a:prstGeom>
+          <a:solidFill>
+            <a:srgbClr val="1E293B"/>
+          </a:solidFill>
+          <a:ln>
+            <a:noFill/>
+          </a:ln>
+        </p:spPr>
+        <p:style>
+          <a:lnRef idx="1">
+            <a:schemeClr val="accent1"/>
+          </a:lnRef>
+          <a:fillRef idx="3">
+            <a:schemeClr val="accent1"/>
+          </a:fillRef>
+          <a:effectRef idx="2">
+            <a:schemeClr val="accent1"/>
+          </a:effectRef>
+          <a:fontRef idx="minor">
+            <a:schemeClr val="lt1"/>
+          </a:fontRef>
+        </p:style>
+        <p:txBody>
+          <a:bodyPr rtlCol="0" anchor="ctr"/>
+          <a:lstStyle/>
+          <a:p>
+            <a:pPr algn="ctr"/>
+          </a:p>
+        </p:txBody>
+      </p:sp>
+      <p:sp>
+        <p:nvSpPr>
+          <p:cNvPr id="14" name="TextBox 13"/>
+          <p:cNvSpPr txBox="1"/>
+          <p:nvPr/>
+        </p:nvSpPr>
+        <p:spPr>
+          <a:xfrm>
+            <a:off x="1554480" y="2651759"/>
+            <a:ext cx="10149840" cy="365760"/>
+          </a:xfrm>
+          <a:prstGeom prst="rect">
+            <a:avLst/>
+          </a:prstGeom>
+          <a:noFill/>
+        </p:spPr>
+        <p:txBody>
+          <a:bodyPr wrap="square">
+            <a:spAutoFit/>
+          </a:bodyPr>
+          <a:lstStyle/>
+          <a:p>
+            <a:pPr algn="l"/>
+            <a:r>
+              <a:rPr sz="1300" b="1" i="0">
+                <a:solidFill>
+                  <a:srgbClr val="FFFFFF"/>
+                </a:solidFill>
+              </a:rPr>
+              <a:t>Adjust cyclone severity parameters</a:t>
+            </a:r>
+          </a:p>
+        </p:txBody>
+      </p:sp>
+      <p:sp>
+        <p:nvSpPr>
+          <p:cNvPr id="15" name="TextBox 14"/>
+          <p:cNvSpPr txBox="1"/>
+          <p:nvPr/>
+        </p:nvSpPr>
+        <p:spPr>
+          <a:xfrm>
+            <a:off x="1554480" y="3063239"/>
+            <a:ext cx="10149840" cy="548640"/>
+          </a:xfrm>
+          <a:prstGeom prst="rect">
+            <a:avLst/>
+          </a:prstGeom>
+          <a:noFill/>
+        </p:spPr>
+        <p:txBody>
+          <a:bodyPr wrap="square">
+            <a:spAutoFit/>
+          </a:bodyPr>
+          <a:lstStyle/>
+          <a:p>
+            <a:pPr algn="l"/>
+            <a:r>
+              <a:rPr sz="1100" b="0" i="0">
+                <a:solidFill>
+                  <a:srgbClr val="B0BEC5"/>
+                </a:solidFill>
+              </a:rPr>
+              <a:t>Move the sliders: Max Wind Speed, Storm Surge Height, 24h Rainfall. Watch the inundation zone polygon intensity and infrastructure markers update.</a:t>
+            </a:r>
+          </a:p>
+        </p:txBody>
+      </p:sp>
+      <p:sp>
+        <p:nvSpPr>
+          <p:cNvPr id="16" name="Rectangle 15"/>
+          <p:cNvSpPr/>
+          <p:nvPr/>
+        </p:nvSpPr>
+        <p:spPr>
+          <a:xfrm>
+            <a:off x="274320" y="3931920"/>
+            <a:ext cx="1005840" cy="1097280"/>
+          </a:xfrm>
+          <a:prstGeom prst="rect">
+            <a:avLst/>
+          </a:prstGeom>
+          <a:solidFill>
+            <a:srgbClr val="1E88E5"/>
+          </a:solidFill>
+          <a:ln>
+            <a:noFill/>
+          </a:ln>
+        </p:spPr>
+        <p:style>
+          <a:lnRef idx="1">
+            <a:schemeClr val="accent1"/>
+          </a:lnRef>
+          <a:fillRef idx="3">
+            <a:schemeClr val="accent1"/>
+          </a:fillRef>
+          <a:effectRef idx="2">
+            <a:schemeClr val="accent1"/>
+          </a:effectRef>
+          <a:fontRef idx="minor">
+            <a:schemeClr val="lt1"/>
+          </a:fontRef>
+        </p:style>
+        <p:txBody>
+          <a:bodyPr rtlCol="0" anchor="ctr"/>
+          <a:lstStyle/>
+          <a:p>
+            <a:pPr algn="ctr"/>
+          </a:p>
+        </p:txBody>
+      </p:sp>
+      <p:sp>
+        <p:nvSpPr>
+          <p:cNvPr id="17" name="TextBox 16"/>
+          <p:cNvSpPr txBox="1"/>
+          <p:nvPr/>
+        </p:nvSpPr>
+        <p:spPr>
+          <a:xfrm>
+            <a:off x="274320" y="4206240"/>
+            <a:ext cx="1005840" cy="457200"/>
+          </a:xfrm>
+          <a:prstGeom prst="rect">
+            <a:avLst/>
+          </a:prstGeom>
+          <a:noFill/>
+        </p:spPr>
+        <p:txBody>
+          <a:bodyPr wrap="square">
+            <a:spAutoFit/>
+          </a:bodyPr>
+          <a:lstStyle/>
+          <a:p>
+            <a:pPr algn="ctr"/>
+            <a:r>
+              <a:rPr sz="1100" b="1" i="0">
+                <a:solidFill>
+                  <a:srgbClr val="FFFFFF"/>
+                </a:solidFill>
+              </a:rPr>
+              <a:t>Step 3</a:t>
+            </a:r>
+          </a:p>
+        </p:txBody>
+      </p:sp>
+      <p:sp>
+        <p:nvSpPr>
+          <p:cNvPr id="18" name="Rectangle 17"/>
+          <p:cNvSpPr/>
+          <p:nvPr/>
+        </p:nvSpPr>
+        <p:spPr>
+          <a:xfrm>
+            <a:off x="1417320" y="3931920"/>
+            <a:ext cx="10515600" cy="1097280"/>
+          </a:xfrm>
+          <a:prstGeom prst="rect">
+            <a:avLst/>
+          </a:prstGeom>
+          <a:solidFill>
+            <a:srgbClr val="1E293B"/>
+          </a:solidFill>
+          <a:ln>
+            <a:noFill/>
+          </a:ln>
+        </p:spPr>
+        <p:style>
+          <a:lnRef idx="1">
+            <a:schemeClr val="accent1"/>
+          </a:lnRef>
+          <a:fillRef idx="3">
+            <a:schemeClr val="accent1"/>
+          </a:fillRef>
+          <a:effectRef idx="2">
+            <a:schemeClr val="accent1"/>
+          </a:effectRef>
+          <a:fontRef idx="minor">
+            <a:schemeClr val="lt1"/>
+          </a:fontRef>
+        </p:style>
+        <p:txBody>
+          <a:bodyPr rtlCol="0" anchor="ctr"/>
+          <a:lstStyle/>
+          <a:p>
+            <a:pPr algn="ctr"/>
+          </a:p>
+        </p:txBody>
+      </p:sp>
+      <p:sp>
+        <p:nvSpPr>
+          <p:cNvPr id="19" name="TextBox 18"/>
+          <p:cNvSpPr txBox="1"/>
+          <p:nvPr/>
+        </p:nvSpPr>
+        <p:spPr>
+          <a:xfrm>
+            <a:off x="1554480" y="3977639"/>
+            <a:ext cx="10149840" cy="365760"/>
+          </a:xfrm>
+          <a:prstGeom prst="rect">
+            <a:avLst/>
+          </a:prstGeom>
+          <a:noFill/>
+        </p:spPr>
+        <p:txBody>
+          <a:bodyPr wrap="square">
+            <a:spAutoFit/>
+          </a:bodyPr>
+          <a:lstStyle/>
+          <a:p>
+            <a:pPr algn="l"/>
+            <a:r>
+              <a:rPr sz="1300" b="1" i="0">
+                <a:solidFill>
+                  <a:srgbClr val="FFFFFF"/>
+                </a:solidFill>
+              </a:rPr>
+              <a:t>Run Gemini Multimodal Risk Synthesis</a:t>
+            </a:r>
+          </a:p>
+        </p:txBody>
+      </p:sp>
+      <p:sp>
+        <p:nvSpPr>
+          <p:cNvPr id="20" name="TextBox 19"/>
+          <p:cNvSpPr txBox="1"/>
+          <p:nvPr/>
+        </p:nvSpPr>
+        <p:spPr>
+          <a:xfrm>
+            <a:off x="1554480" y="4389120"/>
+            <a:ext cx="10149840" cy="548640"/>
+          </a:xfrm>
+          <a:prstGeom prst="rect">
+            <a:avLst/>
+          </a:prstGeom>
+          <a:noFill/>
+        </p:spPr>
+        <p:txBody>
+          <a:bodyPr wrap="square">
+            <a:spAutoFit/>
+          </a:bodyPr>
+          <a:lstStyle/>
+          <a:p>
+            <a:pPr algn="l"/>
+            <a:r>
+              <a:rPr sz="1100" b="0" i="0">
+                <a:solidFill>
+                  <a:srgbClr val="B0BEC5"/>
+                </a:solidFill>
+              </a:rPr>
+              <a:t>Click the '🚀 Run Gemini Multimodal Risk Synthesis' button. Gemini generates a full executive report, evacuation zones, tactical commands, and 4 language dispatches.</a:t>
+            </a:r>
+          </a:p>
+        </p:txBody>
+      </p:sp>
+      <p:sp>
+        <p:nvSpPr>
+          <p:cNvPr id="21" name="Rectangle 20"/>
+          <p:cNvSpPr/>
+          <p:nvPr/>
+        </p:nvSpPr>
+        <p:spPr>
+          <a:xfrm>
+            <a:off x="274320" y="5257800"/>
+            <a:ext cx="1005840" cy="1097280"/>
+          </a:xfrm>
+          <a:prstGeom prst="rect">
+            <a:avLst/>
+          </a:prstGeom>
+          <a:solidFill>
+            <a:srgbClr val="1E88E5"/>
+          </a:solidFill>
+          <a:ln>
+            <a:noFill/>
+          </a:ln>
+        </p:spPr>
+        <p:style>
+          <a:lnRef idx="1">
+            <a:schemeClr val="accent1"/>
+          </a:lnRef>
+          <a:fillRef idx="3">
+            <a:schemeClr val="accent1"/>
+          </a:fillRef>
+          <a:effectRef idx="2">
+            <a:schemeClr val="accent1"/>
+          </a:effectRef>
+          <a:fontRef idx="minor">
+            <a:schemeClr val="lt1"/>
+          </a:fontRef>
+        </p:style>
+        <p:txBody>
+          <a:bodyPr rtlCol="0" anchor="ctr"/>
+          <a:lstStyle/>
+          <a:p>
+            <a:pPr algn="ctr"/>
+          </a:p>
+        </p:txBody>
+      </p:sp>
+      <p:sp>
+        <p:nvSpPr>
+          <p:cNvPr id="22" name="TextBox 21"/>
+          <p:cNvSpPr txBox="1"/>
+          <p:nvPr/>
+        </p:nvSpPr>
+        <p:spPr>
+          <a:xfrm>
+            <a:off x="274320" y="5532120"/>
+            <a:ext cx="1005840" cy="457200"/>
+          </a:xfrm>
+          <a:prstGeom prst="rect">
+            <a:avLst/>
+          </a:prstGeom>
+          <a:noFill/>
+        </p:spPr>
+        <p:txBody>
+          <a:bodyPr wrap="square">
+            <a:spAutoFit/>
+          </a:bodyPr>
+          <a:lstStyle/>
+          <a:p>
+            <a:pPr algn="ctr"/>
+            <a:r>
+              <a:rPr sz="1100" b="1" i="0">
+                <a:solidFill>
+                  <a:srgbClr val="FFFFFF"/>
+                </a:solidFill>
+              </a:rPr>
+              <a:t>Step 4</a:t>
+            </a:r>
+          </a:p>
+        </p:txBody>
+      </p:sp>
+      <p:sp>
+        <p:nvSpPr>
+          <p:cNvPr id="23" name="Rectangle 22"/>
+          <p:cNvSpPr/>
+          <p:nvPr/>
+        </p:nvSpPr>
+        <p:spPr>
+          <a:xfrm>
+            <a:off x="1417320" y="5257800"/>
+            <a:ext cx="10515600" cy="1097280"/>
+          </a:xfrm>
+          <a:prstGeom prst="rect">
+            <a:avLst/>
+          </a:prstGeom>
+          <a:solidFill>
+            <a:srgbClr val="1E293B"/>
+          </a:solidFill>
+          <a:ln>
+            <a:noFill/>
+          </a:ln>
+        </p:spPr>
+        <p:style>
+          <a:lnRef idx="1">
+            <a:schemeClr val="accent1"/>
+          </a:lnRef>
+          <a:fillRef idx="3">
+            <a:schemeClr val="accent1"/>
+          </a:fillRef>
+          <a:effectRef idx="2">
+            <a:schemeClr val="accent1"/>
+          </a:effectRef>
+          <a:fontRef idx="minor">
+            <a:schemeClr val="lt1"/>
+          </a:fontRef>
+        </p:style>
+        <p:txBody>
+          <a:bodyPr rtlCol="0" anchor="ctr"/>
+          <a:lstStyle/>
+          <a:p>
+            <a:pPr algn="ctr"/>
+          </a:p>
+        </p:txBody>
+      </p:sp>
+      <p:sp>
+        <p:nvSpPr>
+          <p:cNvPr id="24" name="TextBox 23"/>
+          <p:cNvSpPr txBox="1"/>
+          <p:nvPr/>
+        </p:nvSpPr>
+        <p:spPr>
+          <a:xfrm>
+            <a:off x="1554480" y="5303520"/>
+            <a:ext cx="10149840" cy="365760"/>
+          </a:xfrm>
+          <a:prstGeom prst="rect">
+            <a:avLst/>
+          </a:prstGeom>
+          <a:noFill/>
+        </p:spPr>
+        <p:txBody>
+          <a:bodyPr wrap="square">
+            <a:spAutoFit/>
+          </a:bodyPr>
+          <a:lstStyle/>
+          <a:p>
+            <a:pPr algn="l"/>
+            <a:r>
+              <a:rPr sz="1300" b="1" i="0">
+                <a:solidFill>
+                  <a:srgbClr val="FFFFFF"/>
+                </a:solidFill>
+              </a:rPr>
+              <a:t>Explore the analytics &amp; submission tab</a:t>
+            </a:r>
+          </a:p>
+        </p:txBody>
+      </p:sp>
+      <p:sp>
+        <p:nvSpPr>
+          <p:cNvPr id="25" name="TextBox 24"/>
+          <p:cNvSpPr txBox="1"/>
+          <p:nvPr/>
+        </p:nvSpPr>
+        <p:spPr>
+          <a:xfrm>
+            <a:off x="1554480" y="5715000"/>
+            <a:ext cx="10149840" cy="548640"/>
+          </a:xfrm>
+          <a:prstGeom prst="rect">
+            <a:avLst/>
+          </a:prstGeom>
+          <a:noFill/>
+        </p:spPr>
+        <p:txBody>
+          <a:bodyPr wrap="square">
+            <a:spAutoFit/>
+          </a:bodyPr>
+          <a:lstStyle/>
+          <a:p>
+            <a:pPr algn="l"/>
+            <a:r>
+              <a:rPr sz="1100" b="0" i="0">
+                <a:solidFill>
+                  <a:srgbClr val="B0BEC5"/>
+                </a:solidFill>
+              </a:rPr>
+              <a:t>Review Asset Inundation Depth charts, the Detailed Infrastructure Exposure Table, and the built-in submission description template.</a:t>
+            </a:r>
+          </a:p>
+        </p:txBody>
+      </p:sp>
+    </p:spTree>
+  </p:cSld>
+  <p:clrMapOvr>
+    <a:masterClrMapping/>
+  </p:clrMapOvr>
+</p:sld>
+</file>
+
+<file path=ppt/slides/slide8.xml><?xml version="1.0" encoding="utf-8"?>
+<p:sld xmlns:a="http://schemas.openxmlformats.org/drawingml/2006/main" xmlns:p="http://schemas.openxmlformats.org/presentationml/2006/main" xmlns:r="http://schemas.openxmlformats.org/officeDocument/2006/relationships">
+  <p:cSld>
+    <p:bg>
+      <p:bgPr>
+        <a:solidFill>
+          <a:srgbClr val="0F172A"/>
+        </a:solidFill>
+        <a:effectLst/>
+      </p:bgPr>
+    </p:bg>
+    <p:spTree>
+      <p:nvGrpSpPr>
+        <p:cNvPr id="1" name=""/>
+        <p:cNvGrpSpPr/>
+        <p:nvPr/>
+      </p:nvGrpSpPr>
+      <p:grpSpPr/>
+      <p:sp>
+        <p:nvSpPr>
+          <p:cNvPr id="2" name="Rectangle 1"/>
+          <p:cNvSpPr/>
+          <p:nvPr/>
+        </p:nvSpPr>
+        <p:spPr>
+          <a:xfrm>
+            <a:off x="0" y="0"/>
+            <a:ext cx="12188952" cy="73152"/>
+          </a:xfrm>
+          <a:prstGeom prst="rect">
+            <a:avLst/>
+          </a:prstGeom>
+          <a:solidFill>
+            <a:srgbClr val="38BDF8"/>
+          </a:solidFill>
+          <a:ln>
+            <a:noFill/>
+          </a:ln>
+        </p:spPr>
+        <p:style>
+          <a:lnRef idx="1">
+            <a:schemeClr val="accent1"/>
+          </a:lnRef>
+          <a:fillRef idx="3">
+            <a:schemeClr val="accent1"/>
+          </a:fillRef>
+          <a:effectRef idx="2">
+            <a:schemeClr val="accent1"/>
+          </a:effectRef>
+          <a:fontRef idx="minor">
+            <a:schemeClr val="lt1"/>
+          </a:fontRef>
+        </p:style>
+        <p:txBody>
+          <a:bodyPr rtlCol="0" anchor="ctr"/>
+          <a:lstStyle/>
+          <a:p>
+            <a:pPr algn="ctr"/>
+          </a:p>
+        </p:txBody>
+      </p:sp>
+      <p:sp>
+        <p:nvSpPr>
+          <p:cNvPr id="3" name="Rectangle 2"/>
+          <p:cNvSpPr/>
+          <p:nvPr/>
+        </p:nvSpPr>
+        <p:spPr>
+          <a:xfrm>
+            <a:off x="0" y="6784848"/>
+            <a:ext cx="12188952" cy="73152"/>
+          </a:xfrm>
+          <a:prstGeom prst="rect">
+            <a:avLst/>
+          </a:prstGeom>
+          <a:solidFill>
+            <a:srgbClr val="1E88E5"/>
+          </a:solidFill>
+          <a:ln>
+            <a:noFill/>
+          </a:ln>
+        </p:spPr>
+        <p:style>
+          <a:lnRef idx="1">
+            <a:schemeClr val="accent1"/>
+          </a:lnRef>
+          <a:fillRef idx="3">
+            <a:schemeClr val="accent1"/>
+          </a:fillRef>
+          <a:effectRef idx="2">
+            <a:schemeClr val="accent1"/>
+          </a:effectRef>
+          <a:fontRef idx="minor">
+            <a:schemeClr val="lt1"/>
+          </a:fontRef>
+        </p:style>
+        <p:txBody>
+          <a:bodyPr rtlCol="0" anchor="ctr"/>
+          <a:lstStyle/>
+          <a:p>
+            <a:pPr algn="ctr"/>
+          </a:p>
+        </p:txBody>
+      </p:sp>
+      <p:sp>
+        <p:nvSpPr>
+          <p:cNvPr id="4" name="TextBox 3"/>
+          <p:cNvSpPr txBox="1"/>
+          <p:nvPr/>
+        </p:nvSpPr>
+        <p:spPr>
+          <a:xfrm>
+            <a:off x="274320" y="137160"/>
+            <a:ext cx="10058400" cy="640080"/>
+          </a:xfrm>
+          <a:prstGeom prst="rect">
+            <a:avLst/>
+          </a:prstGeom>
+          <a:noFill/>
+        </p:spPr>
+        <p:txBody>
+          <a:bodyPr wrap="square">
+            <a:spAutoFit/>
+          </a:bodyPr>
+          <a:lstStyle/>
+          <a:p>
+            <a:pPr algn="l"/>
+            <a:r>
+              <a:rPr sz="3000" b="1" i="0">
+                <a:solidFill>
+                  <a:srgbClr val="38BDF8"/>
+                </a:solidFill>
+              </a:rPr>
+              <a:t>🔭 Roadmap &amp; Closing</a:t>
+            </a:r>
+          </a:p>
+        </p:txBody>
+      </p:sp>
+      <p:sp>
+        <p:nvSpPr>
+          <p:cNvPr id="5" name="Rectangle 4"/>
+          <p:cNvSpPr/>
+          <p:nvPr/>
+        </p:nvSpPr>
+        <p:spPr>
+          <a:xfrm>
+            <a:off x="274320" y="1005840"/>
+            <a:ext cx="3749039" cy="3200400"/>
+          </a:xfrm>
+          <a:prstGeom prst="rect">
+            <a:avLst/>
+          </a:prstGeom>
+          <a:solidFill>
+            <a:srgbClr val="1E293B"/>
+          </a:solidFill>
+          <a:ln>
+            <a:solidFill>
+              <a:srgbClr val="38BDF8"/>
+            </a:solidFill>
+          </a:ln>
+        </p:spPr>
+        <p:style>
+          <a:lnRef idx="1">
+            <a:schemeClr val="accent1"/>
+          </a:lnRef>
+          <a:fillRef idx="3">
+            <a:schemeClr val="accent1"/>
+          </a:fillRef>
+          <a:effectRef idx="2">
+            <a:schemeClr val="accent1"/>
+          </a:effectRef>
+          <a:fontRef idx="minor">
+            <a:schemeClr val="lt1"/>
+          </a:fontRef>
+        </p:style>
+        <p:txBody>
+          <a:bodyPr rtlCol="0" anchor="ctr"/>
+          <a:lstStyle/>
+          <a:p>
+            <a:pPr algn="ctr"/>
+          </a:p>
+        </p:txBody>
+      </p:sp>
+      <p:sp>
+        <p:nvSpPr>
+          <p:cNvPr id="6" name="TextBox 5"/>
+          <p:cNvSpPr txBox="1"/>
+          <p:nvPr/>
+        </p:nvSpPr>
+        <p:spPr>
+          <a:xfrm>
+            <a:off x="274320" y="1051560"/>
+            <a:ext cx="3749039" cy="365760"/>
+          </a:xfrm>
+          <a:prstGeom prst="rect">
+            <a:avLst/>
+          </a:prstGeom>
+          <a:noFill/>
+        </p:spPr>
+        <p:txBody>
+          <a:bodyPr wrap="square">
+            <a:spAutoFit/>
+          </a:bodyPr>
+          <a:lstStyle/>
+          <a:p>
+            <a:pPr algn="ctr"/>
+            <a:r>
+              <a:rPr sz="1400" b="1" i="0">
+                <a:solidFill>
+                  <a:srgbClr val="38BDF8"/>
+                </a:solidFill>
+              </a:rPr>
+              <a:t>Near-Term</a:t>
+            </a:r>
+          </a:p>
+        </p:txBody>
+      </p:sp>
+      <p:sp>
+        <p:nvSpPr>
+          <p:cNvPr id="7" name="TextBox 6"/>
+          <p:cNvSpPr txBox="1"/>
+          <p:nvPr/>
+        </p:nvSpPr>
+        <p:spPr>
+          <a:xfrm>
+            <a:off x="411479" y="1554480"/>
+            <a:ext cx="3474720" cy="2286000"/>
+          </a:xfrm>
+          <a:prstGeom prst="rect">
+            <a:avLst/>
+          </a:prstGeom>
+          <a:noFill/>
+        </p:spPr>
+        <p:txBody>
+          <a:bodyPr wrap="square">
+            <a:spAutoFit/>
+          </a:bodyPr>
+          <a:lstStyle/>
+          <a:p>
+            <a:pPr algn="l"/>
+            <a:r>
+              <a:rPr sz="1200" b="0" i="0">
+                <a:solidFill>
+                  <a:srgbClr val="B0BEC5"/>
+                </a:solidFill>
+              </a:rPr>
+              <a:t>Integrate live IoT river gauge sensors for real-time ground truth validation of flood depth predictions.</a:t>
+            </a:r>
+          </a:p>
+        </p:txBody>
+      </p:sp>
+      <p:sp>
+        <p:nvSpPr>
+          <p:cNvPr id="8" name="Rectangle 7"/>
+          <p:cNvSpPr/>
+          <p:nvPr/>
+        </p:nvSpPr>
+        <p:spPr>
+          <a:xfrm>
+            <a:off x="4206240" y="1005840"/>
+            <a:ext cx="3749039" cy="3200400"/>
+          </a:xfrm>
+          <a:prstGeom prst="rect">
+            <a:avLst/>
+          </a:prstGeom>
+          <a:solidFill>
+            <a:srgbClr val="1E293B"/>
+          </a:solidFill>
+          <a:ln>
+            <a:solidFill>
+              <a:srgbClr val="38BDF8"/>
+            </a:solidFill>
+          </a:ln>
+        </p:spPr>
+        <p:style>
+          <a:lnRef idx="1">
+            <a:schemeClr val="accent1"/>
+          </a:lnRef>
+          <a:fillRef idx="3">
+            <a:schemeClr val="accent1"/>
+          </a:fillRef>
+          <a:effectRef idx="2">
+            <a:schemeClr val="accent1"/>
+          </a:effectRef>
+          <a:fontRef idx="minor">
+            <a:schemeClr val="lt1"/>
+          </a:fontRef>
+        </p:style>
+        <p:txBody>
+          <a:bodyPr rtlCol="0" anchor="ctr"/>
+          <a:lstStyle/>
+          <a:p>
+            <a:pPr algn="ctr"/>
+          </a:p>
+        </p:txBody>
+      </p:sp>
+      <p:sp>
+        <p:nvSpPr>
+          <p:cNvPr id="9" name="TextBox 8"/>
+          <p:cNvSpPr txBox="1"/>
+          <p:nvPr/>
+        </p:nvSpPr>
+        <p:spPr>
+          <a:xfrm>
+            <a:off x="4206240" y="1051560"/>
+            <a:ext cx="3749039" cy="365760"/>
+          </a:xfrm>
+          <a:prstGeom prst="rect">
+            <a:avLst/>
+          </a:prstGeom>
+          <a:noFill/>
+        </p:spPr>
+        <p:txBody>
+          <a:bodyPr wrap="square">
+            <a:spAutoFit/>
+          </a:bodyPr>
+          <a:lstStyle/>
+          <a:p>
+            <a:pPr algn="ctr"/>
+            <a:r>
+              <a:rPr sz="1400" b="1" i="0">
+                <a:solidFill>
+                  <a:srgbClr val="38BDF8"/>
+                </a:solidFill>
+              </a:rPr>
+              <a:t>Mid-Term</a:t>
+            </a:r>
+          </a:p>
+        </p:txBody>
+      </p:sp>
+      <p:sp>
+        <p:nvSpPr>
+          <p:cNvPr id="10" name="TextBox 9"/>
+          <p:cNvSpPr txBox="1"/>
+          <p:nvPr/>
+        </p:nvSpPr>
+        <p:spPr>
+          <a:xfrm>
+            <a:off x="4343400" y="1554480"/>
+            <a:ext cx="3474720" cy="2286000"/>
+          </a:xfrm>
+          <a:prstGeom prst="rect">
+            <a:avLst/>
+          </a:prstGeom>
+          <a:noFill/>
+        </p:spPr>
+        <p:txBody>
+          <a:bodyPr wrap="square">
+            <a:spAutoFit/>
+          </a:bodyPr>
+          <a:lstStyle/>
+          <a:p>
+            <a:pPr algn="l"/>
+            <a:r>
+              <a:rPr sz="1200" b="0" i="0">
+                <a:solidFill>
+                  <a:srgbClr val="B0BEC5"/>
+                </a:solidFill>
+              </a:rPr>
+              <a:t>Build automated WhatsApp/Telegram bot for direct citizen dispatch, integrating with national alert systems.</a:t>
+            </a:r>
+          </a:p>
+        </p:txBody>
+      </p:sp>
+      <p:sp>
+        <p:nvSpPr>
+          <p:cNvPr id="11" name="Rectangle 10"/>
+          <p:cNvSpPr/>
+          <p:nvPr/>
+        </p:nvSpPr>
+        <p:spPr>
+          <a:xfrm>
+            <a:off x="8138160" y="1005840"/>
+            <a:ext cx="3749039" cy="3200400"/>
+          </a:xfrm>
+          <a:prstGeom prst="rect">
+            <a:avLst/>
+          </a:prstGeom>
+          <a:solidFill>
+            <a:srgbClr val="1E293B"/>
+          </a:solidFill>
+          <a:ln>
+            <a:solidFill>
+              <a:srgbClr val="38BDF8"/>
+            </a:solidFill>
+          </a:ln>
+        </p:spPr>
+        <p:style>
+          <a:lnRef idx="1">
+            <a:schemeClr val="accent1"/>
+          </a:lnRef>
+          <a:fillRef idx="3">
+            <a:schemeClr val="accent1"/>
+          </a:fillRef>
+          <a:effectRef idx="2">
+            <a:schemeClr val="accent1"/>
+          </a:effectRef>
+          <a:fontRef idx="minor">
+            <a:schemeClr val="lt1"/>
+          </a:fontRef>
+        </p:style>
+        <p:txBody>
+          <a:bodyPr rtlCol="0" anchor="ctr"/>
+          <a:lstStyle/>
+          <a:p>
+            <a:pPr algn="ctr"/>
+          </a:p>
+        </p:txBody>
+      </p:sp>
+      <p:sp>
+        <p:nvSpPr>
+          <p:cNvPr id="12" name="TextBox 11"/>
+          <p:cNvSpPr txBox="1"/>
+          <p:nvPr/>
+        </p:nvSpPr>
+        <p:spPr>
+          <a:xfrm>
+            <a:off x="8138160" y="1051560"/>
+            <a:ext cx="3749039" cy="365760"/>
+          </a:xfrm>
+          <a:prstGeom prst="rect">
+            <a:avLst/>
+          </a:prstGeom>
+          <a:noFill/>
+        </p:spPr>
+        <p:txBody>
+          <a:bodyPr wrap="square">
+            <a:spAutoFit/>
+          </a:bodyPr>
+          <a:lstStyle/>
+          <a:p>
+            <a:pPr algn="ctr"/>
+            <a:r>
+              <a:rPr sz="1400" b="1" i="0">
+                <a:solidFill>
+                  <a:srgbClr val="38BDF8"/>
+                </a:solidFill>
+              </a:rPr>
+              <a:t>Long-Term</a:t>
+            </a:r>
+          </a:p>
+        </p:txBody>
+      </p:sp>
+      <p:sp>
+        <p:nvSpPr>
+          <p:cNvPr id="13" name="TextBox 12"/>
+          <p:cNvSpPr txBox="1"/>
+          <p:nvPr/>
+        </p:nvSpPr>
+        <p:spPr>
+          <a:xfrm>
+            <a:off x="8275320" y="1554480"/>
+            <a:ext cx="3474720" cy="2286000"/>
+          </a:xfrm>
+          <a:prstGeom prst="rect">
+            <a:avLst/>
+          </a:prstGeom>
+          <a:noFill/>
+        </p:spPr>
+        <p:txBody>
+          <a:bodyPr wrap="square">
+            <a:spAutoFit/>
+          </a:bodyPr>
+          <a:lstStyle/>
+          <a:p>
+            <a:pPr algn="l"/>
+            <a:r>
+              <a:rPr sz="1200" b="0" i="0">
+                <a:solidFill>
+                  <a:srgbClr val="B0BEC5"/>
+                </a:solidFill>
+              </a:rPr>
+              <a:t>Expand coverage to full APAC coastline: Philippines, Vietnam, Bangladesh, Myanmar.</a:t>
+            </a:r>
+          </a:p>
+        </p:txBody>
+      </p:sp>
+      <p:sp>
+        <p:nvSpPr>
+          <p:cNvPr id="14" name="Rectangle 13"/>
+          <p:cNvSpPr/>
+          <p:nvPr/>
+        </p:nvSpPr>
+        <p:spPr>
+          <a:xfrm>
+            <a:off x="274320" y="4480560"/>
+            <a:ext cx="11640312" cy="1645920"/>
+          </a:xfrm>
+          <a:prstGeom prst="rect">
+            <a:avLst/>
+          </a:prstGeom>
+          <a:solidFill>
+            <a:srgbClr val="1E293B"/>
+          </a:solidFill>
+          <a:ln>
+            <a:solidFill>
+              <a:srgbClr val="F59E0B"/>
+            </a:solidFill>
+          </a:ln>
+        </p:spPr>
+        <p:style>
+          <a:lnRef idx="1">
+            <a:schemeClr val="accent1"/>
+          </a:lnRef>
+          <a:fillRef idx="3">
+            <a:schemeClr val="accent1"/>
+          </a:fillRef>
+          <a:effectRef idx="2">
+            <a:schemeClr val="accent1"/>
+          </a:effectRef>
+          <a:fontRef idx="minor">
+            <a:schemeClr val="lt1"/>
+          </a:fontRef>
+        </p:style>
+        <p:txBody>
+          <a:bodyPr rtlCol="0" anchor="ctr"/>
+          <a:lstStyle/>
+          <a:p>
+            <a:pPr algn="ctr"/>
+          </a:p>
+        </p:txBody>
+      </p:sp>
+      <p:sp>
+        <p:nvSpPr>
+          <p:cNvPr id="15" name="TextBox 14"/>
+          <p:cNvSpPr txBox="1"/>
+          <p:nvPr/>
+        </p:nvSpPr>
+        <p:spPr>
+          <a:xfrm>
+            <a:off x="457200" y="4572000"/>
+            <a:ext cx="11247120" cy="731520"/>
+          </a:xfrm>
+          <a:prstGeom prst="rect">
+            <a:avLst/>
+          </a:prstGeom>
+          <a:noFill/>
+        </p:spPr>
+        <p:txBody>
+          <a:bodyPr wrap="square">
+            <a:spAutoFit/>
+          </a:bodyPr>
+          <a:lstStyle/>
+          <a:p>
+            <a:pPr algn="ctr"/>
+            <a:r>
+              <a:rPr sz="1600" b="1" i="1">
+                <a:solidFill>
+                  <a:srgbClr val="F59E0B"/>
+                </a:solidFill>
+              </a:rPr>
+              <a:t>"With ResiliTrack AI, we aren't just weathering the storm — we are outsmarting it."</a:t>
+            </a:r>
+          </a:p>
+        </p:txBody>
+      </p:sp>
+      <p:sp>
+        <p:nvSpPr>
+          <p:cNvPr id="16" name="TextBox 15"/>
+          <p:cNvSpPr txBox="1"/>
+          <p:nvPr/>
+        </p:nvSpPr>
+        <p:spPr>
+          <a:xfrm>
+            <a:off x="274320" y="6126480"/>
+            <a:ext cx="7315200" cy="457200"/>
+          </a:xfrm>
+          <a:prstGeom prst="rect">
+            <a:avLst/>
+          </a:prstGeom>
+          <a:noFill/>
+        </p:spPr>
+        <p:txBody>
+          <a:bodyPr wrap="square">
+            <a:spAutoFit/>
+          </a:bodyPr>
+          <a:lstStyle/>
+          <a:p>
+            <a:pPr algn="l"/>
+            <a:r>
+              <a:rPr sz="1200" b="0" i="0">
+                <a:solidFill>
+                  <a:srgbClr val="B0BEC5"/>
+                </a:solidFill>
+              </a:rPr>
+              <a:t>GitHub: github.com/swatiicfai/ResiliTrack-AI-CycloneShield-</a:t>
+            </a:r>
+          </a:p>
+        </p:txBody>
+      </p:sp>
+      <p:sp>
+        <p:nvSpPr>
+          <p:cNvPr id="17" name="TextBox 16"/>
+          <p:cNvSpPr txBox="1"/>
+          <p:nvPr/>
+        </p:nvSpPr>
+        <p:spPr>
+          <a:xfrm>
+            <a:off x="274320" y="6492240"/>
+            <a:ext cx="7315200" cy="365760"/>
+          </a:xfrm>
+          <a:prstGeom prst="rect">
+            <a:avLst/>
+          </a:prstGeom>
+          <a:noFill/>
+        </p:spPr>
+        <p:txBody>
+          <a:bodyPr wrap="square">
+            <a:spAutoFit/>
+          </a:bodyPr>
+          <a:lstStyle/>
+          <a:p>
+            <a:pPr algn="l"/>
+            <a:r>
+              <a:rPr sz="1200" b="0" i="0">
+                <a:solidFill>
+                  <a:srgbClr val="38BDF8"/>
+                </a:solidFill>
+              </a:rPr>
+              <a:t>Live App: efomw9k5jde5gwkxe3ybuj.streamlit.app</a:t>
             </a:r>
           </a:p>
         </p:txBody>
